--- a/soutenance/Soutenance_PFE_Cleopatre.pptx
+++ b/soutenance/Soutenance_PFE_Cleopatre.pptx
@@ -23,6 +23,11 @@
     <p:sldId id="271" r:id="rId23"/>
     <p:sldId id="272" r:id="rId24"/>
     <p:sldId id="273" r:id="rId25"/>
+    <p:sldId id="274" r:id="rId26"/>
+    <p:sldId id="275" r:id="rId27"/>
+    <p:sldId id="276" r:id="rId28"/>
+    <p:sldId id="277" r:id="rId29"/>
+    <p:sldId id="278" r:id="rId30"/>
   </p:sldIdLst>
   <p:sldSz cx="12191695" cy="6858000" type="screen4x3"/>
   <p:notesSz cx="6858000" cy="9144000"/>
@@ -1079,7 +1084,7 @@
           <a:lstStyle/>
           <a:p>
             <a:r>
-              <a:t>Bilan : les 24 récits sont terminés et démontrés, la recette tourne sous Docker, le rapport fait 102 pages. Personnellement : autonomie full-stack, rigueur Scrum, et l'exigence d'écrire un code que l'on peut expliquer au jury.</a:t>
+              <a:t>Bilan : les 24 récits sont terminés et démontrés, la recette tourne sous Docker, le rapport fait 104 pages. Personnellement : autonomie full-stack, rigueur Scrum, et l'exigence d'écrire un code que l'on peut expliquer au jury.</a:t>
             </a:r>
           </a:p>
         </p:txBody>
@@ -1149,6 +1154,76 @@
           <a:lstStyle/>
           <a:p>
             <a:r>
+              <a:t>Passons à la démonstration en direct : six minutes, trois actes — acheter, piloter, rassurer. Le QR et les comptes de recette sont affichés. En cas de réseau capricieux, les captures du rapport prennent le relais.</a:t>
+            </a:r>
+          </a:p>
+        </p:txBody>
+      </p:sp>
+      <p:sp>
+        <p:nvSpPr>
+          <p:cNvPr id="4" name="Slide Number Placeholder 3"/>
+          <p:cNvSpPr>
+            <a:spLocks noGrp="1"/>
+          </p:cNvSpPr>
+          <p:nvPr>
+            <p:ph type="sldNum" idx="5" sz="quarter"/>
+          </p:nvPr>
+        </p:nvSpPr>
+        <p:spPr/>
+      </p:sp>
+    </p:spTree>
+  </p:cSld>
+  <p:clrMapOvr>
+    <a:masterClrMapping/>
+  </p:clrMapOvr>
+</p:notes>
+</file>
+
+<file path=ppt/notesSlides/notesSlide19.xml><?xml version="1.0" encoding="utf-8"?>
+<p:notes xmlns:a="http://schemas.openxmlformats.org/drawingml/2006/main" xmlns:p="http://schemas.openxmlformats.org/presentationml/2006/main" xmlns:r="http://schemas.openxmlformats.org/officeDocument/2006/relationships">
+  <p:cSld>
+    <p:spTree>
+      <p:nvGrpSpPr>
+        <p:cNvPr id="1" name=""/>
+        <p:cNvGrpSpPr/>
+        <p:nvPr/>
+      </p:nvGrpSpPr>
+      <p:grpSpPr>
+        <a:xfrm>
+          <a:off x="0" y="0"/>
+          <a:ext cx="0" cy="0"/>
+          <a:chOff x="0" y="0"/>
+          <a:chExt cx="0" cy="0"/>
+        </a:xfrm>
+      </p:grpSpPr>
+      <p:sp>
+        <p:nvSpPr>
+          <p:cNvPr id="2" name="Slide Image Placeholder 1"/>
+          <p:cNvSpPr>
+            <a:spLocks noGrp="1"/>
+          </p:cNvSpPr>
+          <p:nvPr>
+            <p:ph type="sldImg" idx="2"/>
+          </p:nvPr>
+        </p:nvSpPr>
+        <p:spPr/>
+      </p:sp>
+      <p:sp>
+        <p:nvSpPr>
+          <p:cNvPr id="3" name="Notes Placeholder 2"/>
+          <p:cNvSpPr>
+            <a:spLocks noGrp="1"/>
+          </p:cNvSpPr>
+          <p:nvPr>
+            <p:ph type="body" idx="3" sz="quarter"/>
+          </p:nvPr>
+        </p:nvSpPr>
+        <p:spPr/>
+        <p:txBody>
+          <a:bodyPr/>
+          <a:lstStyle/>
+          <a:p>
+            <a:r>
               <a:t>Conclure : remercier le jury, rappeler les perspectives — paiement en ligne, version arabe, recommandation — et ouvrir aux questions.</a:t>
             </a:r>
           </a:p>
@@ -1220,6 +1295,286 @@
           <a:p>
             <a:r>
               <a:t>Mon exposé suit cinq temps : le contexte, la solution et la méthode, la réalisation sprint par sprint, les garanties de sécurité, puis le bilan et les perspectives.</a:t>
+            </a:r>
+          </a:p>
+        </p:txBody>
+      </p:sp>
+      <p:sp>
+        <p:nvSpPr>
+          <p:cNvPr id="4" name="Slide Number Placeholder 3"/>
+          <p:cNvSpPr>
+            <a:spLocks noGrp="1"/>
+          </p:cNvSpPr>
+          <p:nvPr>
+            <p:ph type="sldNum" idx="5" sz="quarter"/>
+          </p:nvPr>
+        </p:nvSpPr>
+        <p:spPr/>
+      </p:sp>
+    </p:spTree>
+  </p:cSld>
+  <p:clrMapOvr>
+    <a:masterClrMapping/>
+  </p:clrMapOvr>
+</p:notes>
+</file>
+
+<file path=ppt/notesSlides/notesSlide20.xml><?xml version="1.0" encoding="utf-8"?>
+<p:notes xmlns:a="http://schemas.openxmlformats.org/drawingml/2006/main" xmlns:p="http://schemas.openxmlformats.org/presentationml/2006/main" xmlns:r="http://schemas.openxmlformats.org/officeDocument/2006/relationships">
+  <p:cSld>
+    <p:spTree>
+      <p:nvGrpSpPr>
+        <p:cNvPr id="1" name=""/>
+        <p:cNvGrpSpPr/>
+        <p:nvPr/>
+      </p:nvGrpSpPr>
+      <p:grpSpPr>
+        <a:xfrm>
+          <a:off x="0" y="0"/>
+          <a:ext cx="0" cy="0"/>
+          <a:chOff x="0" y="0"/>
+          <a:chExt cx="0" cy="0"/>
+        </a:xfrm>
+      </p:grpSpPr>
+      <p:sp>
+        <p:nvSpPr>
+          <p:cNvPr id="2" name="Slide Image Placeholder 1"/>
+          <p:cNvSpPr>
+            <a:spLocks noGrp="1"/>
+          </p:cNvSpPr>
+          <p:nvPr>
+            <p:ph type="sldImg" idx="2"/>
+          </p:nvPr>
+        </p:nvSpPr>
+        <p:spPr/>
+      </p:sp>
+      <p:sp>
+        <p:nvSpPr>
+          <p:cNvPr id="3" name="Notes Placeholder 2"/>
+          <p:cNvSpPr>
+            <a:spLocks noGrp="1"/>
+          </p:cNvSpPr>
+          <p:nvPr>
+            <p:ph type="body" idx="3" sz="quarter"/>
+          </p:nvPr>
+        </p:nvSpPr>
+        <p:spPr/>
+        <p:txBody>
+          <a:bodyPr/>
+          <a:lstStyle/>
+          <a:p>
+            <a:r>
+              <a:t>Secours : si le jury questionne les transitions — 7 statuts, transitions verrouillées en base, effets idempotents (paiement COD, fidélité, réassort).</a:t>
+            </a:r>
+          </a:p>
+        </p:txBody>
+      </p:sp>
+      <p:sp>
+        <p:nvSpPr>
+          <p:cNvPr id="4" name="Slide Number Placeholder 3"/>
+          <p:cNvSpPr>
+            <a:spLocks noGrp="1"/>
+          </p:cNvSpPr>
+          <p:nvPr>
+            <p:ph type="sldNum" idx="5" sz="quarter"/>
+          </p:nvPr>
+        </p:nvSpPr>
+        <p:spPr/>
+      </p:sp>
+    </p:spTree>
+  </p:cSld>
+  <p:clrMapOvr>
+    <a:masterClrMapping/>
+  </p:clrMapOvr>
+</p:notes>
+</file>
+
+<file path=ppt/notesSlides/notesSlide21.xml><?xml version="1.0" encoding="utf-8"?>
+<p:notes xmlns:a="http://schemas.openxmlformats.org/drawingml/2006/main" xmlns:p="http://schemas.openxmlformats.org/presentationml/2006/main" xmlns:r="http://schemas.openxmlformats.org/officeDocument/2006/relationships">
+  <p:cSld>
+    <p:spTree>
+      <p:nvGrpSpPr>
+        <p:cNvPr id="1" name=""/>
+        <p:cNvGrpSpPr/>
+        <p:nvPr/>
+      </p:nvGrpSpPr>
+      <p:grpSpPr>
+        <a:xfrm>
+          <a:off x="0" y="0"/>
+          <a:ext cx="0" cy="0"/>
+          <a:chOff x="0" y="0"/>
+          <a:chExt cx="0" cy="0"/>
+        </a:xfrm>
+      </p:grpSpPr>
+      <p:sp>
+        <p:nvSpPr>
+          <p:cNvPr id="2" name="Slide Image Placeholder 1"/>
+          <p:cNvSpPr>
+            <a:spLocks noGrp="1"/>
+          </p:cNvSpPr>
+          <p:nvPr>
+            <p:ph type="sldImg" idx="2"/>
+          </p:nvPr>
+        </p:nvSpPr>
+        <p:spPr/>
+      </p:sp>
+      <p:sp>
+        <p:nvSpPr>
+          <p:cNvPr id="3" name="Notes Placeholder 2"/>
+          <p:cNvSpPr>
+            <a:spLocks noGrp="1"/>
+          </p:cNvSpPr>
+          <p:nvPr>
+            <p:ph type="body" idx="3" sz="quarter"/>
+          </p:nvPr>
+        </p:nvSpPr>
+        <p:spPr/>
+        <p:txBody>
+          <a:bodyPr/>
+          <a:lstStyle/>
+          <a:p>
+            <a:r>
+              <a:t>Secours : si le jury creuse la sécurité — scrypt salé, sessions opaques 256 bits en cookie httpOnly, gardes serveur cumulatifs, anti-brute-force et anti-énumération.</a:t>
+            </a:r>
+          </a:p>
+        </p:txBody>
+      </p:sp>
+      <p:sp>
+        <p:nvSpPr>
+          <p:cNvPr id="4" name="Slide Number Placeholder 3"/>
+          <p:cNvSpPr>
+            <a:spLocks noGrp="1"/>
+          </p:cNvSpPr>
+          <p:nvPr>
+            <p:ph type="sldNum" idx="5" sz="quarter"/>
+          </p:nvPr>
+        </p:nvSpPr>
+        <p:spPr/>
+      </p:sp>
+    </p:spTree>
+  </p:cSld>
+  <p:clrMapOvr>
+    <a:masterClrMapping/>
+  </p:clrMapOvr>
+</p:notes>
+</file>
+
+<file path=ppt/notesSlides/notesSlide22.xml><?xml version="1.0" encoding="utf-8"?>
+<p:notes xmlns:a="http://schemas.openxmlformats.org/drawingml/2006/main" xmlns:p="http://schemas.openxmlformats.org/presentationml/2006/main" xmlns:r="http://schemas.openxmlformats.org/officeDocument/2006/relationships">
+  <p:cSld>
+    <p:spTree>
+      <p:nvGrpSpPr>
+        <p:cNvPr id="1" name=""/>
+        <p:cNvGrpSpPr/>
+        <p:nvPr/>
+      </p:nvGrpSpPr>
+      <p:grpSpPr>
+        <a:xfrm>
+          <a:off x="0" y="0"/>
+          <a:ext cx="0" cy="0"/>
+          <a:chOff x="0" y="0"/>
+          <a:chExt cx="0" cy="0"/>
+        </a:xfrm>
+      </p:grpSpPr>
+      <p:sp>
+        <p:nvSpPr>
+          <p:cNvPr id="2" name="Slide Image Placeholder 1"/>
+          <p:cNvSpPr>
+            <a:spLocks noGrp="1"/>
+          </p:cNvSpPr>
+          <p:nvPr>
+            <p:ph type="sldImg" idx="2"/>
+          </p:nvPr>
+        </p:nvSpPr>
+        <p:spPr/>
+      </p:sp>
+      <p:sp>
+        <p:nvSpPr>
+          <p:cNvPr id="3" name="Notes Placeholder 2"/>
+          <p:cNvSpPr>
+            <a:spLocks noGrp="1"/>
+          </p:cNvSpPr>
+          <p:nvPr>
+            <p:ph type="body" idx="3" sz="quarter"/>
+          </p:nvPr>
+        </p:nvSpPr>
+        <p:spPr/>
+        <p:txBody>
+          <a:bodyPr/>
+          <a:lstStyle/>
+          <a:p>
+            <a:r>
+              <a:t>Secours : si le jury veut le modèle complet — 10 tables autonomes reliées à la release 1, 24 tables et 10 énumérations au total, dictionnaire en Annexe B du rapport.</a:t>
+            </a:r>
+          </a:p>
+        </p:txBody>
+      </p:sp>
+      <p:sp>
+        <p:nvSpPr>
+          <p:cNvPr id="4" name="Slide Number Placeholder 3"/>
+          <p:cNvSpPr>
+            <a:spLocks noGrp="1"/>
+          </p:cNvSpPr>
+          <p:nvPr>
+            <p:ph type="sldNum" idx="5" sz="quarter"/>
+          </p:nvPr>
+        </p:nvSpPr>
+        <p:spPr/>
+      </p:sp>
+    </p:spTree>
+  </p:cSld>
+  <p:clrMapOvr>
+    <a:masterClrMapping/>
+  </p:clrMapOvr>
+</p:notes>
+</file>
+
+<file path=ppt/notesSlides/notesSlide23.xml><?xml version="1.0" encoding="utf-8"?>
+<p:notes xmlns:a="http://schemas.openxmlformats.org/drawingml/2006/main" xmlns:p="http://schemas.openxmlformats.org/presentationml/2006/main" xmlns:r="http://schemas.openxmlformats.org/officeDocument/2006/relationships">
+  <p:cSld>
+    <p:spTree>
+      <p:nvGrpSpPr>
+        <p:cNvPr id="1" name=""/>
+        <p:cNvGrpSpPr/>
+        <p:nvPr/>
+      </p:nvGrpSpPr>
+      <p:grpSpPr>
+        <a:xfrm>
+          <a:off x="0" y="0"/>
+          <a:ext cx="0" cy="0"/>
+          <a:chOff x="0" y="0"/>
+          <a:chExt cx="0" cy="0"/>
+        </a:xfrm>
+      </p:grpSpPr>
+      <p:sp>
+        <p:nvSpPr>
+          <p:cNvPr id="2" name="Slide Image Placeholder 1"/>
+          <p:cNvSpPr>
+            <a:spLocks noGrp="1"/>
+          </p:cNvSpPr>
+          <p:nvPr>
+            <p:ph type="sldImg" idx="2"/>
+          </p:nvPr>
+        </p:nvSpPr>
+        <p:spPr/>
+      </p:sp>
+      <p:sp>
+        <p:nvSpPr>
+          <p:cNvPr id="3" name="Notes Placeholder 2"/>
+          <p:cNvSpPr>
+            <a:spLocks noGrp="1"/>
+          </p:cNvSpPr>
+          <p:nvPr>
+            <p:ph type="body" idx="3" sz="quarter"/>
+          </p:nvPr>
+        </p:nvSpPr>
+        <p:spPr/>
+        <p:txBody>
+          <a:bodyPr/>
+          <a:lstStyle/>
+          <a:p>
+            <a:r>
+              <a:t>Secours : si le jury questionne l'exploitation — conteneurs web + base, variables d'environnement, seed de démonstration, sauvegardes pg_dump, guide en Annexe C.</a:t>
             </a:r>
           </a:p>
         </p:txBody>
@@ -4758,9 +5113,95 @@
           </a:p>
         </p:txBody>
       </p:sp>
+      <p:sp>
+        <p:nvSpPr>
+          <p:cNvPr id="3" name="!!FRAME"/>
+          <p:cNvSpPr/>
+          <p:nvPr/>
+        </p:nvSpPr>
+        <p:spPr>
+          <a:xfrm>
+            <a:off x="146304" y="146304"/>
+            <a:ext cx="11899087" cy="6565392"/>
+          </a:xfrm>
+          <a:prstGeom prst="rect">
+            <a:avLst/>
+          </a:prstGeom>
+          <a:noFill/>
+          <a:ln w="25400">
+            <a:solidFill>
+              <a:srgbClr val="C9A959"/>
+            </a:solidFill>
+          </a:ln>
+        </p:spPr>
+        <p:style>
+          <a:lnRef idx="1">
+            <a:schemeClr val="accent1"/>
+          </a:lnRef>
+          <a:fillRef idx="3">
+            <a:schemeClr val="accent1"/>
+          </a:fillRef>
+          <a:effectRef idx="2">
+            <a:schemeClr val="accent1"/>
+          </a:effectRef>
+          <a:fontRef idx="minor">
+            <a:schemeClr val="lt1"/>
+          </a:fontRef>
+        </p:style>
+        <p:txBody>
+          <a:bodyPr rtlCol="0" anchor="ctr"/>
+          <a:lstStyle/>
+          <a:p>
+            <a:pPr algn="ctr"/>
+          </a:p>
+        </p:txBody>
+      </p:sp>
+      <p:sp>
+        <p:nvSpPr>
+          <p:cNvPr id="4" name="!!FRAME"/>
+          <p:cNvSpPr/>
+          <p:nvPr/>
+        </p:nvSpPr>
+        <p:spPr>
+          <a:xfrm>
+            <a:off x="237744" y="237744"/>
+            <a:ext cx="11716207" cy="6382512"/>
+          </a:xfrm>
+          <a:prstGeom prst="rect">
+            <a:avLst/>
+          </a:prstGeom>
+          <a:noFill/>
+          <a:ln w="9525">
+            <a:solidFill>
+              <a:srgbClr val="C9A959"/>
+            </a:solidFill>
+          </a:ln>
+        </p:spPr>
+        <p:style>
+          <a:lnRef idx="1">
+            <a:schemeClr val="accent1"/>
+          </a:lnRef>
+          <a:fillRef idx="3">
+            <a:schemeClr val="accent1"/>
+          </a:fillRef>
+          <a:effectRef idx="2">
+            <a:schemeClr val="accent1"/>
+          </a:effectRef>
+          <a:fontRef idx="minor">
+            <a:schemeClr val="lt1"/>
+          </a:fontRef>
+        </p:style>
+        <p:txBody>
+          <a:bodyPr rtlCol="0" anchor="ctr"/>
+          <a:lstStyle/>
+          <a:p>
+            <a:pPr algn="ctr"/>
+          </a:p>
+        </p:txBody>
+      </p:sp>
       <p:pic>
         <p:nvPicPr>
-          <p:cNvPr id="3" name="!!LOGO" descr="fig01_logo.png"/>
+          <p:cNvPr id="5" name="!!LOGO" descr="fig01_logo.png"/>
           <p:cNvPicPr>
             <a:picLocks noChangeAspect="1"/>
           </p:cNvPicPr>
@@ -4777,14 +5218,16 @@
             <a:off x="5413248" y="847164"/>
             <a:ext cx="1371600" cy="1048870"/>
           </a:xfrm>
-          <a:prstGeom prst="rect">
-            <a:avLst/>
+          <a:prstGeom prst="roundRect">
+            <a:avLst>
+              <a:gd name="adj" fmla="val 9000"/>
+            </a:avLst>
           </a:prstGeom>
         </p:spPr>
       </p:pic>
       <p:sp>
         <p:nvSpPr>
-          <p:cNvPr id="4" name="!!EYE"/>
+          <p:cNvPr id="6" name="!!EYE"/>
           <p:cNvSpPr txBox="1"/>
           <p:nvPr/>
         </p:nvSpPr>
@@ -4823,7 +5266,7 @@
       </p:sp>
       <p:sp>
         <p:nvSpPr>
-          <p:cNvPr id="5" name="!!TITLE"/>
+          <p:cNvPr id="7" name="!!TITLE"/>
           <p:cNvSpPr txBox="1"/>
           <p:nvPr/>
         </p:nvSpPr>
@@ -4882,7 +5325,7 @@
       </p:sp>
       <p:sp>
         <p:nvSpPr>
-          <p:cNvPr id="6" name="!!RULE"/>
+          <p:cNvPr id="8" name="!!RULE"/>
           <p:cNvSpPr/>
           <p:nvPr/>
         </p:nvSpPr>
@@ -4925,7 +5368,7 @@
       </p:sp>
       <p:sp>
         <p:nvSpPr>
-          <p:cNvPr id="7" name="TextBox 6"/>
+          <p:cNvPr id="9" name="TextBox 8"/>
           <p:cNvSpPr txBox="1"/>
           <p:nvPr/>
         </p:nvSpPr>
@@ -5076,7 +5519,7 @@
         <p:spPr>
           <a:xfrm>
             <a:off x="640080" y="292608"/>
-            <a:ext cx="10881360" cy="329184"/>
+            <a:ext cx="9509760" cy="329184"/>
           </a:xfrm>
           <a:prstGeom prst="rect">
             <a:avLst/>
@@ -5115,7 +5558,7 @@
         <p:spPr>
           <a:xfrm>
             <a:off x="640080" y="658368"/>
-            <a:ext cx="10881360" cy="822960"/>
+            <a:ext cx="9509760" cy="822960"/>
           </a:xfrm>
           <a:prstGeom prst="rect">
             <a:avLst/>
@@ -5188,9 +5631,48 @@
           </a:p>
         </p:txBody>
       </p:sp>
+      <p:sp>
+        <p:nvSpPr>
+          <p:cNvPr id="6" name="!!GHOST"/>
+          <p:cNvSpPr txBox="1"/>
+          <p:nvPr/>
+        </p:nvSpPr>
+        <p:spPr>
+          <a:xfrm>
+            <a:off x="10287000" y="256032"/>
+            <a:ext cx="1325880" cy="1188720"/>
+          </a:xfrm>
+          <a:prstGeom prst="rect">
+            <a:avLst/>
+          </a:prstGeom>
+          <a:noFill/>
+        </p:spPr>
+        <p:txBody>
+          <a:bodyPr wrap="square" anchor="t">
+            <a:spAutoFit/>
+          </a:bodyPr>
+          <a:lstStyle/>
+          <a:p>
+            <a:pPr algn="r">
+              <a:spcAft>
+                <a:spcPts val="0"/>
+              </a:spcAft>
+            </a:pPr>
+            <a:r>
+              <a:rPr sz="5200" b="1" i="0">
+                <a:solidFill>
+                  <a:srgbClr val="5A4C24"/>
+                </a:solidFill>
+                <a:latin typeface="Georgia"/>
+              </a:rPr>
+              <a:t>02</a:t>
+            </a:r>
+          </a:p>
+        </p:txBody>
+      </p:sp>
       <p:pic>
         <p:nvPicPr>
-          <p:cNvPr id="6" name="MODELE" descr="figR1_modele.png"/>
+          <p:cNvPr id="7" name="MODELE" descr="figR1_modele.png"/>
           <p:cNvPicPr>
             <a:picLocks noChangeAspect="1"/>
           </p:cNvPicPr>
@@ -5207,19 +5689,21 @@
             <a:off x="2413059" y="1737360"/>
             <a:ext cx="3403481" cy="4434840"/>
           </a:xfrm>
-          <a:prstGeom prst="rect">
-            <a:avLst/>
-          </a:prstGeom>
           <a:ln w="15875">
             <a:solidFill>
               <a:srgbClr val="9A7B3F"/>
             </a:solidFill>
           </a:ln>
+          <a:prstGeom prst="roundRect">
+            <a:avLst>
+              <a:gd name="adj" fmla="val 9000"/>
+            </a:avLst>
+          </a:prstGeom>
         </p:spPr>
       </p:pic>
       <p:sp>
         <p:nvSpPr>
-          <p:cNvPr id="7" name="MODSTATS"/>
+          <p:cNvPr id="8" name="MODSTATS"/>
           <p:cNvSpPr/>
           <p:nvPr/>
         </p:nvSpPr>
@@ -5266,7 +5750,7 @@
       </p:sp>
       <p:sp>
         <p:nvSpPr>
-          <p:cNvPr id="8" name="TextBox 7"/>
+          <p:cNvPr id="9" name="TextBox 8"/>
           <p:cNvSpPr txBox="1"/>
           <p:nvPr/>
         </p:nvSpPr>
@@ -5367,7 +5851,7 @@
       </p:sp>
       <p:sp>
         <p:nvSpPr>
-          <p:cNvPr id="9" name="!!FOOT"/>
+          <p:cNvPr id="10" name="!!FOOT"/>
           <p:cNvSpPr txBox="1"/>
           <p:nvPr/>
         </p:nvSpPr>
@@ -5406,7 +5890,7 @@
       </p:sp>
       <p:sp>
         <p:nvSpPr>
-          <p:cNvPr id="10" name="!!NUM"/>
+          <p:cNvPr id="11" name="!!NUM"/>
           <p:cNvSpPr txBox="1"/>
           <p:nvPr/>
         </p:nvSpPr>
@@ -5525,7 +6009,7 @@
         <p:spPr>
           <a:xfrm>
             <a:off x="640080" y="292608"/>
-            <a:ext cx="10881360" cy="329184"/>
+            <a:ext cx="9509760" cy="329184"/>
           </a:xfrm>
           <a:prstGeom prst="rect">
             <a:avLst/>
@@ -5564,7 +6048,7 @@
         <p:spPr>
           <a:xfrm>
             <a:off x="640080" y="658368"/>
-            <a:ext cx="10881360" cy="822960"/>
+            <a:ext cx="9509760" cy="822960"/>
           </a:xfrm>
           <a:prstGeom prst="rect">
             <a:avLst/>
@@ -5637,9 +6121,48 @@
           </a:p>
         </p:txBody>
       </p:sp>
+      <p:sp>
+        <p:nvSpPr>
+          <p:cNvPr id="6" name="!!GHOST"/>
+          <p:cNvSpPr txBox="1"/>
+          <p:nvPr/>
+        </p:nvSpPr>
+        <p:spPr>
+          <a:xfrm>
+            <a:off x="10287000" y="256032"/>
+            <a:ext cx="1325880" cy="1188720"/>
+          </a:xfrm>
+          <a:prstGeom prst="rect">
+            <a:avLst/>
+          </a:prstGeom>
+          <a:noFill/>
+        </p:spPr>
+        <p:txBody>
+          <a:bodyPr wrap="square" anchor="t">
+            <a:spAutoFit/>
+          </a:bodyPr>
+          <a:lstStyle/>
+          <a:p>
+            <a:pPr algn="r">
+              <a:spcAft>
+                <a:spcPts val="0"/>
+              </a:spcAft>
+            </a:pPr>
+            <a:r>
+              <a:rPr sz="5200" b="1" i="0">
+                <a:solidFill>
+                  <a:srgbClr val="5A4C24"/>
+                </a:solidFill>
+                <a:latin typeface="Georgia"/>
+              </a:rPr>
+              <a:t>03</a:t>
+            </a:r>
+          </a:p>
+        </p:txBody>
+      </p:sp>
       <p:pic>
         <p:nvPicPr>
-          <p:cNvPr id="6" name="S1A" descr="fig35_login.png"/>
+          <p:cNvPr id="7" name="S1A" descr="fig35_login.png"/>
           <p:cNvPicPr>
             <a:picLocks noChangeAspect="1"/>
           </p:cNvPicPr>
@@ -5656,19 +6179,21 @@
             <a:off x="982980" y="1783080"/>
             <a:ext cx="4663440" cy="3108960"/>
           </a:xfrm>
-          <a:prstGeom prst="rect">
-            <a:avLst/>
-          </a:prstGeom>
           <a:ln w="15875">
             <a:solidFill>
               <a:srgbClr val="9A7B3F"/>
             </a:solidFill>
           </a:ln>
+          <a:prstGeom prst="roundRect">
+            <a:avLst>
+              <a:gd name="adj" fmla="val 9000"/>
+            </a:avLst>
+          </a:prstGeom>
         </p:spPr>
       </p:pic>
       <p:pic>
         <p:nvPicPr>
-          <p:cNvPr id="7" name="S1B" descr="fig43_dashboard1.png"/>
+          <p:cNvPr id="8" name="S1B" descr="fig43_dashboard1.png"/>
           <p:cNvPicPr>
             <a:picLocks noChangeAspect="1"/>
           </p:cNvPicPr>
@@ -5685,19 +6210,21 @@
             <a:off x="6542532" y="1783080"/>
             <a:ext cx="4663440" cy="3108960"/>
           </a:xfrm>
-          <a:prstGeom prst="rect">
-            <a:avLst/>
-          </a:prstGeom>
           <a:ln w="15875">
             <a:solidFill>
               <a:srgbClr val="9A7B3F"/>
             </a:solidFill>
           </a:ln>
+          <a:prstGeom prst="roundRect">
+            <a:avLst>
+              <a:gd name="adj" fmla="val 9000"/>
+            </a:avLst>
+          </a:prstGeom>
         </p:spPr>
       </p:pic>
       <p:sp>
         <p:nvSpPr>
-          <p:cNvPr id="8" name="TextBox 7"/>
+          <p:cNvPr id="9" name="TextBox 8"/>
           <p:cNvSpPr txBox="1"/>
           <p:nvPr/>
         </p:nvSpPr>
@@ -5736,7 +6263,7 @@
       </p:sp>
       <p:sp>
         <p:nvSpPr>
-          <p:cNvPr id="9" name="!!FOOT"/>
+          <p:cNvPr id="10" name="!!FOOT"/>
           <p:cNvSpPr txBox="1"/>
           <p:nvPr/>
         </p:nvSpPr>
@@ -5775,7 +6302,7 @@
       </p:sp>
       <p:sp>
         <p:nvSpPr>
-          <p:cNvPr id="10" name="!!NUM"/>
+          <p:cNvPr id="11" name="!!NUM"/>
           <p:cNvSpPr txBox="1"/>
           <p:nvPr/>
         </p:nvSpPr>
@@ -5894,7 +6421,7 @@
         <p:spPr>
           <a:xfrm>
             <a:off x="640080" y="292608"/>
-            <a:ext cx="10881360" cy="329184"/>
+            <a:ext cx="9509760" cy="329184"/>
           </a:xfrm>
           <a:prstGeom prst="rect">
             <a:avLst/>
@@ -5933,7 +6460,7 @@
         <p:spPr>
           <a:xfrm>
             <a:off x="640080" y="658368"/>
-            <a:ext cx="10881360" cy="822960"/>
+            <a:ext cx="9509760" cy="822960"/>
           </a:xfrm>
           <a:prstGeom prst="rect">
             <a:avLst/>
@@ -6006,9 +6533,48 @@
           </a:p>
         </p:txBody>
       </p:sp>
+      <p:sp>
+        <p:nvSpPr>
+          <p:cNvPr id="6" name="!!GHOST"/>
+          <p:cNvSpPr txBox="1"/>
+          <p:nvPr/>
+        </p:nvSpPr>
+        <p:spPr>
+          <a:xfrm>
+            <a:off x="10287000" y="256032"/>
+            <a:ext cx="1325880" cy="1188720"/>
+          </a:xfrm>
+          <a:prstGeom prst="rect">
+            <a:avLst/>
+          </a:prstGeom>
+          <a:noFill/>
+        </p:spPr>
+        <p:txBody>
+          <a:bodyPr wrap="square" anchor="t">
+            <a:spAutoFit/>
+          </a:bodyPr>
+          <a:lstStyle/>
+          <a:p>
+            <a:pPr algn="r">
+              <a:spcAft>
+                <a:spcPts val="0"/>
+              </a:spcAft>
+            </a:pPr>
+            <a:r>
+              <a:rPr sz="5200" b="1" i="0">
+                <a:solidFill>
+                  <a:srgbClr val="5A4C24"/>
+                </a:solidFill>
+                <a:latin typeface="Georgia"/>
+              </a:rPr>
+              <a:t>03</a:t>
+            </a:r>
+          </a:p>
+        </p:txBody>
+      </p:sp>
       <p:pic>
         <p:nvPicPr>
-          <p:cNvPr id="6" name="S2A" descr="fig59_checkout34.png"/>
+          <p:cNvPr id="7" name="S2A" descr="fig59_checkout34.png"/>
           <p:cNvPicPr>
             <a:picLocks noChangeAspect="1"/>
           </p:cNvPicPr>
@@ -6025,19 +6591,21 @@
             <a:off x="982980" y="1783080"/>
             <a:ext cx="4663440" cy="3108960"/>
           </a:xfrm>
-          <a:prstGeom prst="rect">
-            <a:avLst/>
-          </a:prstGeom>
           <a:ln w="15875">
             <a:solidFill>
               <a:srgbClr val="9A7B3F"/>
             </a:solidFill>
           </a:ln>
+          <a:prstGeom prst="roundRect">
+            <a:avLst>
+              <a:gd name="adj" fmla="val 9000"/>
+            </a:avLst>
+          </a:prstGeom>
         </p:spPr>
       </p:pic>
       <p:pic>
         <p:nvPicPr>
-          <p:cNvPr id="7" name="S2B" descr="fig62_suivi.png"/>
+          <p:cNvPr id="8" name="S2B" descr="fig62_suivi.png"/>
           <p:cNvPicPr>
             <a:picLocks noChangeAspect="1"/>
           </p:cNvPicPr>
@@ -6054,19 +6622,21 @@
             <a:off x="6542532" y="1783080"/>
             <a:ext cx="4663440" cy="3108960"/>
           </a:xfrm>
-          <a:prstGeom prst="rect">
-            <a:avLst/>
-          </a:prstGeom>
           <a:ln w="15875">
             <a:solidFill>
               <a:srgbClr val="9A7B3F"/>
             </a:solidFill>
           </a:ln>
+          <a:prstGeom prst="roundRect">
+            <a:avLst>
+              <a:gd name="adj" fmla="val 9000"/>
+            </a:avLst>
+          </a:prstGeom>
         </p:spPr>
       </p:pic>
       <p:sp>
         <p:nvSpPr>
-          <p:cNvPr id="8" name="TextBox 7"/>
+          <p:cNvPr id="9" name="TextBox 8"/>
           <p:cNvSpPr txBox="1"/>
           <p:nvPr/>
         </p:nvSpPr>
@@ -6105,7 +6675,7 @@
       </p:sp>
       <p:sp>
         <p:nvSpPr>
-          <p:cNvPr id="9" name="!!FOOT"/>
+          <p:cNvPr id="10" name="!!FOOT"/>
           <p:cNvSpPr txBox="1"/>
           <p:nvPr/>
         </p:nvSpPr>
@@ -6144,7 +6714,7 @@
       </p:sp>
       <p:sp>
         <p:nvSpPr>
-          <p:cNvPr id="10" name="!!NUM"/>
+          <p:cNvPr id="11" name="!!NUM"/>
           <p:cNvSpPr txBox="1"/>
           <p:nvPr/>
         </p:nvSpPr>
@@ -6263,7 +6833,7 @@
         <p:spPr>
           <a:xfrm>
             <a:off x="640080" y="292608"/>
-            <a:ext cx="10881360" cy="329184"/>
+            <a:ext cx="9509760" cy="329184"/>
           </a:xfrm>
           <a:prstGeom prst="rect">
             <a:avLst/>
@@ -6302,7 +6872,7 @@
         <p:spPr>
           <a:xfrm>
             <a:off x="640080" y="658368"/>
-            <a:ext cx="10881360" cy="822960"/>
+            <a:ext cx="9509760" cy="822960"/>
           </a:xfrm>
           <a:prstGeom prst="rect">
             <a:avLst/>
@@ -6375,9 +6945,48 @@
           </a:p>
         </p:txBody>
       </p:sp>
+      <p:sp>
+        <p:nvSpPr>
+          <p:cNvPr id="6" name="!!GHOST"/>
+          <p:cNvSpPr txBox="1"/>
+          <p:nvPr/>
+        </p:nvSpPr>
+        <p:spPr>
+          <a:xfrm>
+            <a:off x="10287000" y="256032"/>
+            <a:ext cx="1325880" cy="1188720"/>
+          </a:xfrm>
+          <a:prstGeom prst="rect">
+            <a:avLst/>
+          </a:prstGeom>
+          <a:noFill/>
+        </p:spPr>
+        <p:txBody>
+          <a:bodyPr wrap="square" anchor="t">
+            <a:spAutoFit/>
+          </a:bodyPr>
+          <a:lstStyle/>
+          <a:p>
+            <a:pPr algn="r">
+              <a:spcAft>
+                <a:spcPts val="0"/>
+              </a:spcAft>
+            </a:pPr>
+            <a:r>
+              <a:rPr sz="5200" b="1" i="0">
+                <a:solidFill>
+                  <a:srgbClr val="5A4C24"/>
+                </a:solidFill>
+                <a:latin typeface="Georgia"/>
+              </a:rPr>
+              <a:t>03</a:t>
+            </a:r>
+          </a:p>
+        </p:txBody>
+      </p:sp>
       <p:pic>
         <p:nvPicPr>
-          <p:cNvPr id="6" name="S3A" descr="fig69_reviews.png"/>
+          <p:cNvPr id="7" name="S3A" descr="fig69_reviews.png"/>
           <p:cNvPicPr>
             <a:picLocks noChangeAspect="1"/>
           </p:cNvPicPr>
@@ -6394,19 +7003,21 @@
             <a:off x="982980" y="1783080"/>
             <a:ext cx="4663440" cy="3108960"/>
           </a:xfrm>
-          <a:prstGeom prst="rect">
-            <a:avLst/>
-          </a:prstGeom>
           <a:ln w="15875">
             <a:solidFill>
               <a:srgbClr val="9A7B3F"/>
             </a:solidFill>
           </a:ln>
+          <a:prstGeom prst="roundRect">
+            <a:avLst>
+              <a:gd name="adj" fmla="val 9000"/>
+            </a:avLst>
+          </a:prstGeom>
         </p:spPr>
       </p:pic>
       <p:pic>
         <p:nvPicPr>
-          <p:cNvPr id="7" name="S3B" descr="fig71_ticket_reply.png"/>
+          <p:cNvPr id="8" name="S3B" descr="fig71_ticket_reply.png"/>
           <p:cNvPicPr>
             <a:picLocks noChangeAspect="1"/>
           </p:cNvPicPr>
@@ -6423,19 +7034,21 @@
             <a:off x="6542532" y="1783080"/>
             <a:ext cx="4663440" cy="3108960"/>
           </a:xfrm>
-          <a:prstGeom prst="rect">
-            <a:avLst/>
-          </a:prstGeom>
           <a:ln w="15875">
             <a:solidFill>
               <a:srgbClr val="9A7B3F"/>
             </a:solidFill>
           </a:ln>
+          <a:prstGeom prst="roundRect">
+            <a:avLst>
+              <a:gd name="adj" fmla="val 9000"/>
+            </a:avLst>
+          </a:prstGeom>
         </p:spPr>
       </p:pic>
       <p:sp>
         <p:nvSpPr>
-          <p:cNvPr id="8" name="TextBox 7"/>
+          <p:cNvPr id="9" name="TextBox 8"/>
           <p:cNvSpPr txBox="1"/>
           <p:nvPr/>
         </p:nvSpPr>
@@ -6474,7 +7087,7 @@
       </p:sp>
       <p:sp>
         <p:nvSpPr>
-          <p:cNvPr id="9" name="!!FOOT"/>
+          <p:cNvPr id="10" name="!!FOOT"/>
           <p:cNvSpPr txBox="1"/>
           <p:nvPr/>
         </p:nvSpPr>
@@ -6513,7 +7126,7 @@
       </p:sp>
       <p:sp>
         <p:nvSpPr>
-          <p:cNvPr id="10" name="!!NUM"/>
+          <p:cNvPr id="11" name="!!NUM"/>
           <p:cNvSpPr txBox="1"/>
           <p:nvPr/>
         </p:nvSpPr>
@@ -6632,7 +7245,7 @@
         <p:spPr>
           <a:xfrm>
             <a:off x="640080" y="292608"/>
-            <a:ext cx="10881360" cy="329184"/>
+            <a:ext cx="9509760" cy="329184"/>
           </a:xfrm>
           <a:prstGeom prst="rect">
             <a:avLst/>
@@ -6671,7 +7284,7 @@
         <p:spPr>
           <a:xfrm>
             <a:off x="640080" y="658368"/>
-            <a:ext cx="10881360" cy="822960"/>
+            <a:ext cx="9509760" cy="822960"/>
           </a:xfrm>
           <a:prstGeom prst="rect">
             <a:avLst/>
@@ -6744,9 +7357,48 @@
           </a:p>
         </p:txBody>
       </p:sp>
+      <p:sp>
+        <p:nvSpPr>
+          <p:cNvPr id="6" name="!!GHOST"/>
+          <p:cNvSpPr txBox="1"/>
+          <p:nvPr/>
+        </p:nvSpPr>
+        <p:spPr>
+          <a:xfrm>
+            <a:off x="10287000" y="256032"/>
+            <a:ext cx="1325880" cy="1188720"/>
+          </a:xfrm>
+          <a:prstGeom prst="rect">
+            <a:avLst/>
+          </a:prstGeom>
+          <a:noFill/>
+        </p:spPr>
+        <p:txBody>
+          <a:bodyPr wrap="square" anchor="t">
+            <a:spAutoFit/>
+          </a:bodyPr>
+          <a:lstStyle/>
+          <a:p>
+            <a:pPr algn="r">
+              <a:spcAft>
+                <a:spcPts val="0"/>
+              </a:spcAft>
+            </a:pPr>
+            <a:r>
+              <a:rPr sz="5200" b="1" i="0">
+                <a:solidFill>
+                  <a:srgbClr val="5A4C24"/>
+                </a:solidFill>
+                <a:latin typeface="Georgia"/>
+              </a:rPr>
+              <a:t>03</a:t>
+            </a:r>
+          </a:p>
+        </p:txBody>
+      </p:sp>
       <p:pic>
         <p:nvPicPr>
-          <p:cNvPr id="6" name="S4A" descr="fig78_search.png"/>
+          <p:cNvPr id="7" name="S4A" descr="fig78_search.png"/>
           <p:cNvPicPr>
             <a:picLocks noChangeAspect="1"/>
           </p:cNvPicPr>
@@ -6763,19 +7415,21 @@
             <a:off x="982980" y="1783080"/>
             <a:ext cx="4663440" cy="3108960"/>
           </a:xfrm>
-          <a:prstGeom prst="rect">
-            <a:avLst/>
-          </a:prstGeom>
           <a:ln w="15875">
             <a:solidFill>
               <a:srgbClr val="9A7B3F"/>
             </a:solidFill>
           </a:ln>
+          <a:prstGeom prst="roundRect">
+            <a:avLst>
+              <a:gd name="adj" fmla="val 9000"/>
+            </a:avLst>
+          </a:prstGeom>
         </p:spPr>
       </p:pic>
       <p:pic>
         <p:nvPicPr>
-          <p:cNvPr id="7" name="S4B" descr="fig83_docker.png"/>
+          <p:cNvPr id="8" name="S4B" descr="fig83_docker.png"/>
           <p:cNvPicPr>
             <a:picLocks noChangeAspect="1"/>
           </p:cNvPicPr>
@@ -6792,19 +7446,21 @@
             <a:off x="6199632" y="1797627"/>
             <a:ext cx="5349240" cy="3079865"/>
           </a:xfrm>
-          <a:prstGeom prst="rect">
-            <a:avLst/>
-          </a:prstGeom>
           <a:ln w="15875">
             <a:solidFill>
               <a:srgbClr val="9A7B3F"/>
             </a:solidFill>
           </a:ln>
+          <a:prstGeom prst="roundRect">
+            <a:avLst>
+              <a:gd name="adj" fmla="val 9000"/>
+            </a:avLst>
+          </a:prstGeom>
         </p:spPr>
       </p:pic>
       <p:sp>
         <p:nvSpPr>
-          <p:cNvPr id="8" name="TextBox 7"/>
+          <p:cNvPr id="9" name="TextBox 8"/>
           <p:cNvSpPr txBox="1"/>
           <p:nvPr/>
         </p:nvSpPr>
@@ -6843,7 +7499,7 @@
       </p:sp>
       <p:sp>
         <p:nvSpPr>
-          <p:cNvPr id="9" name="!!FOOT"/>
+          <p:cNvPr id="10" name="!!FOOT"/>
           <p:cNvSpPr txBox="1"/>
           <p:nvPr/>
         </p:nvSpPr>
@@ -6882,7 +7538,7 @@
       </p:sp>
       <p:sp>
         <p:nvSpPr>
-          <p:cNvPr id="10" name="!!NUM"/>
+          <p:cNvPr id="11" name="!!NUM"/>
           <p:cNvSpPr txBox="1"/>
           <p:nvPr/>
         </p:nvSpPr>
@@ -7001,7 +7657,7 @@
         <p:spPr>
           <a:xfrm>
             <a:off x="640080" y="292608"/>
-            <a:ext cx="10881360" cy="329184"/>
+            <a:ext cx="9509760" cy="329184"/>
           </a:xfrm>
           <a:prstGeom prst="rect">
             <a:avLst/>
@@ -7040,7 +7696,7 @@
         <p:spPr>
           <a:xfrm>
             <a:off x="640080" y="658368"/>
-            <a:ext cx="10881360" cy="822960"/>
+            <a:ext cx="9509760" cy="822960"/>
           </a:xfrm>
           <a:prstGeom prst="rect">
             <a:avLst/>
@@ -7115,7 +7771,46 @@
       </p:sp>
       <p:sp>
         <p:nvSpPr>
-          <p:cNvPr id="6" name="AVA"/>
+          <p:cNvPr id="6" name="!!GHOST"/>
+          <p:cNvSpPr txBox="1"/>
+          <p:nvPr/>
+        </p:nvSpPr>
+        <p:spPr>
+          <a:xfrm>
+            <a:off x="10287000" y="256032"/>
+            <a:ext cx="1325880" cy="1188720"/>
+          </a:xfrm>
+          <a:prstGeom prst="rect">
+            <a:avLst/>
+          </a:prstGeom>
+          <a:noFill/>
+        </p:spPr>
+        <p:txBody>
+          <a:bodyPr wrap="square" anchor="t">
+            <a:spAutoFit/>
+          </a:bodyPr>
+          <a:lstStyle/>
+          <a:p>
+            <a:pPr algn="r">
+              <a:spcAft>
+                <a:spcPts val="0"/>
+              </a:spcAft>
+            </a:pPr>
+            <a:r>
+              <a:rPr sz="5200" b="1" i="0">
+                <a:solidFill>
+                  <a:srgbClr val="5A4C24"/>
+                </a:solidFill>
+                <a:latin typeface="Georgia"/>
+              </a:rPr>
+              <a:t>03</a:t>
+            </a:r>
+          </a:p>
+        </p:txBody>
+      </p:sp>
+      <p:sp>
+        <p:nvSpPr>
+          <p:cNvPr id="7" name="AVA"/>
           <p:cNvSpPr/>
           <p:nvPr/>
         </p:nvSpPr>
@@ -7162,7 +7857,7 @@
       </p:sp>
       <p:sp>
         <p:nvSpPr>
-          <p:cNvPr id="7" name="TextBox 6"/>
+          <p:cNvPr id="8" name="TextBox 7"/>
           <p:cNvSpPr txBox="1"/>
           <p:nvPr/>
         </p:nvSpPr>
@@ -7201,7 +7896,7 @@
       </p:sp>
       <p:pic>
         <p:nvPicPr>
-          <p:cNvPr id="8" name="AVANTIMG" descr="avant_accueil.png"/>
+          <p:cNvPr id="9" name="AVANTIMG" descr="avant_accueil.png"/>
           <p:cNvPicPr>
             <a:picLocks noChangeAspect="1"/>
           </p:cNvPicPr>
@@ -7218,19 +7913,21 @@
             <a:off x="640080" y="2610196"/>
             <a:ext cx="5349240" cy="2917767"/>
           </a:xfrm>
-          <a:prstGeom prst="rect">
-            <a:avLst/>
-          </a:prstGeom>
           <a:ln w="15875">
             <a:solidFill>
               <a:srgbClr val="9A7B3F"/>
             </a:solidFill>
           </a:ln>
+          <a:prstGeom prst="roundRect">
+            <a:avLst>
+              <a:gd name="adj" fmla="val 9000"/>
+            </a:avLst>
+          </a:prstGeom>
         </p:spPr>
       </p:pic>
       <p:sp>
         <p:nvSpPr>
-          <p:cNvPr id="9" name="APA"/>
+          <p:cNvPr id="10" name="APA"/>
           <p:cNvSpPr/>
           <p:nvPr/>
         </p:nvSpPr>
@@ -7277,7 +7974,7 @@
       </p:sp>
       <p:sp>
         <p:nvSpPr>
-          <p:cNvPr id="10" name="TextBox 9"/>
+          <p:cNvPr id="11" name="TextBox 10"/>
           <p:cNvSpPr txBox="1"/>
           <p:nvPr/>
         </p:nvSpPr>
@@ -7316,7 +8013,7 @@
       </p:sp>
       <p:pic>
         <p:nvPicPr>
-          <p:cNvPr id="11" name="APRESIMG" descr="fig85_home.png"/>
+          <p:cNvPr id="12" name="APRESIMG" descr="fig85_home.png"/>
           <p:cNvPicPr>
             <a:picLocks noChangeAspect="1"/>
           </p:cNvPicPr>
@@ -7333,19 +8030,21 @@
             <a:off x="6611112" y="2560320"/>
             <a:ext cx="4526280" cy="3017520"/>
           </a:xfrm>
-          <a:prstGeom prst="rect">
-            <a:avLst/>
-          </a:prstGeom>
           <a:ln w="15875">
             <a:solidFill>
               <a:srgbClr val="9A7B3F"/>
             </a:solidFill>
           </a:ln>
+          <a:prstGeom prst="roundRect">
+            <a:avLst>
+              <a:gd name="adj" fmla="val 9000"/>
+            </a:avLst>
+          </a:prstGeom>
         </p:spPr>
       </p:pic>
       <p:sp>
         <p:nvSpPr>
-          <p:cNvPr id="12" name="TextBox 11"/>
+          <p:cNvPr id="13" name="TextBox 12"/>
           <p:cNvSpPr txBox="1"/>
           <p:nvPr/>
         </p:nvSpPr>
@@ -7384,7 +8083,7 @@
       </p:sp>
       <p:sp>
         <p:nvSpPr>
-          <p:cNvPr id="13" name="!!FOOT"/>
+          <p:cNvPr id="14" name="!!FOOT"/>
           <p:cNvSpPr txBox="1"/>
           <p:nvPr/>
         </p:nvSpPr>
@@ -7423,7 +8122,7 @@
       </p:sp>
       <p:sp>
         <p:nvSpPr>
-          <p:cNvPr id="14" name="!!NUM"/>
+          <p:cNvPr id="15" name="!!NUM"/>
           <p:cNvSpPr txBox="1"/>
           <p:nvPr/>
         </p:nvSpPr>
@@ -7542,7 +8241,7 @@
         <p:spPr>
           <a:xfrm>
             <a:off x="640080" y="292608"/>
-            <a:ext cx="10881360" cy="329184"/>
+            <a:ext cx="9509760" cy="329184"/>
           </a:xfrm>
           <a:prstGeom prst="rect">
             <a:avLst/>
@@ -7581,7 +8280,7 @@
         <p:spPr>
           <a:xfrm>
             <a:off x="640080" y="658368"/>
-            <a:ext cx="10881360" cy="822960"/>
+            <a:ext cx="9509760" cy="822960"/>
           </a:xfrm>
           <a:prstGeom prst="rect">
             <a:avLst/>
@@ -7656,7 +8355,46 @@
       </p:sp>
       <p:sp>
         <p:nvSpPr>
-          <p:cNvPr id="6" name="SEC0"/>
+          <p:cNvPr id="6" name="!!GHOST"/>
+          <p:cNvSpPr txBox="1"/>
+          <p:nvPr/>
+        </p:nvSpPr>
+        <p:spPr>
+          <a:xfrm>
+            <a:off x="10287000" y="256032"/>
+            <a:ext cx="1325880" cy="1188720"/>
+          </a:xfrm>
+          <a:prstGeom prst="rect">
+            <a:avLst/>
+          </a:prstGeom>
+          <a:noFill/>
+        </p:spPr>
+        <p:txBody>
+          <a:bodyPr wrap="square" anchor="t">
+            <a:spAutoFit/>
+          </a:bodyPr>
+          <a:lstStyle/>
+          <a:p>
+            <a:pPr algn="r">
+              <a:spcAft>
+                <a:spcPts val="0"/>
+              </a:spcAft>
+            </a:pPr>
+            <a:r>
+              <a:rPr sz="5200" b="1" i="0">
+                <a:solidFill>
+                  <a:srgbClr val="5A4C24"/>
+                </a:solidFill>
+                <a:latin typeface="Georgia"/>
+              </a:rPr>
+              <a:t>04</a:t>
+            </a:r>
+          </a:p>
+        </p:txBody>
+      </p:sp>
+      <p:sp>
+        <p:nvSpPr>
+          <p:cNvPr id="7" name="SEC0"/>
           <p:cNvSpPr/>
           <p:nvPr/>
         </p:nvSpPr>
@@ -7703,7 +8441,7 @@
       </p:sp>
       <p:sp>
         <p:nvSpPr>
-          <p:cNvPr id="7" name="TextBox 6"/>
+          <p:cNvPr id="8" name="TextBox 7"/>
           <p:cNvSpPr txBox="1"/>
           <p:nvPr/>
         </p:nvSpPr>
@@ -7768,7 +8506,7 @@
       </p:sp>
       <p:sp>
         <p:nvSpPr>
-          <p:cNvPr id="8" name="SEC1"/>
+          <p:cNvPr id="9" name="SEC1"/>
           <p:cNvSpPr/>
           <p:nvPr/>
         </p:nvSpPr>
@@ -7815,7 +8553,7 @@
       </p:sp>
       <p:sp>
         <p:nvSpPr>
-          <p:cNvPr id="9" name="TextBox 8"/>
+          <p:cNvPr id="10" name="TextBox 9"/>
           <p:cNvSpPr txBox="1"/>
           <p:nvPr/>
         </p:nvSpPr>
@@ -7880,7 +8618,7 @@
       </p:sp>
       <p:sp>
         <p:nvSpPr>
-          <p:cNvPr id="10" name="SEC2"/>
+          <p:cNvPr id="11" name="SEC2"/>
           <p:cNvSpPr/>
           <p:nvPr/>
         </p:nvSpPr>
@@ -7927,7 +8665,7 @@
       </p:sp>
       <p:sp>
         <p:nvSpPr>
-          <p:cNvPr id="11" name="TextBox 10"/>
+          <p:cNvPr id="12" name="TextBox 11"/>
           <p:cNvSpPr txBox="1"/>
           <p:nvPr/>
         </p:nvSpPr>
@@ -7992,7 +8730,7 @@
       </p:sp>
       <p:sp>
         <p:nvSpPr>
-          <p:cNvPr id="12" name="SEC3"/>
+          <p:cNvPr id="13" name="SEC3"/>
           <p:cNvSpPr/>
           <p:nvPr/>
         </p:nvSpPr>
@@ -8039,7 +8777,7 @@
       </p:sp>
       <p:sp>
         <p:nvSpPr>
-          <p:cNvPr id="13" name="TextBox 12"/>
+          <p:cNvPr id="14" name="TextBox 13"/>
           <p:cNvSpPr txBox="1"/>
           <p:nvPr/>
         </p:nvSpPr>
@@ -8104,7 +8842,7 @@
       </p:sp>
       <p:sp>
         <p:nvSpPr>
-          <p:cNvPr id="14" name="SEC4"/>
+          <p:cNvPr id="15" name="SEC4"/>
           <p:cNvSpPr/>
           <p:nvPr/>
         </p:nvSpPr>
@@ -8151,7 +8889,7 @@
       </p:sp>
       <p:sp>
         <p:nvSpPr>
-          <p:cNvPr id="15" name="TextBox 14"/>
+          <p:cNvPr id="16" name="TextBox 15"/>
           <p:cNvSpPr txBox="1"/>
           <p:nvPr/>
         </p:nvSpPr>
@@ -8216,7 +8954,7 @@
       </p:sp>
       <p:sp>
         <p:nvSpPr>
-          <p:cNvPr id="16" name="SEC5"/>
+          <p:cNvPr id="17" name="SEC5"/>
           <p:cNvSpPr/>
           <p:nvPr/>
         </p:nvSpPr>
@@ -8263,7 +9001,7 @@
       </p:sp>
       <p:sp>
         <p:nvSpPr>
-          <p:cNvPr id="17" name="TextBox 16"/>
+          <p:cNvPr id="18" name="TextBox 17"/>
           <p:cNvSpPr txBox="1"/>
           <p:nvPr/>
         </p:nvSpPr>
@@ -8328,7 +9066,7 @@
       </p:sp>
       <p:sp>
         <p:nvSpPr>
-          <p:cNvPr id="18" name="!!FOOT"/>
+          <p:cNvPr id="19" name="!!FOOT"/>
           <p:cNvSpPr txBox="1"/>
           <p:nvPr/>
         </p:nvSpPr>
@@ -8367,7 +9105,7 @@
       </p:sp>
       <p:sp>
         <p:nvSpPr>
-          <p:cNvPr id="19" name="!!NUM"/>
+          <p:cNvPr id="20" name="!!NUM"/>
           <p:cNvSpPr txBox="1"/>
           <p:nvPr/>
         </p:nvSpPr>
@@ -8486,7 +9224,7 @@
         <p:spPr>
           <a:xfrm>
             <a:off x="640080" y="292608"/>
-            <a:ext cx="10881360" cy="329184"/>
+            <a:ext cx="9509760" cy="329184"/>
           </a:xfrm>
           <a:prstGeom prst="rect">
             <a:avLst/>
@@ -8525,7 +9263,7 @@
         <p:spPr>
           <a:xfrm>
             <a:off x="640080" y="658368"/>
-            <a:ext cx="10881360" cy="822960"/>
+            <a:ext cx="9509760" cy="822960"/>
           </a:xfrm>
           <a:prstGeom prst="rect">
             <a:avLst/>
@@ -8600,7 +9338,46 @@
       </p:sp>
       <p:sp>
         <p:nvSpPr>
-          <p:cNvPr id="6" name="BIL0"/>
+          <p:cNvPr id="6" name="!!GHOST"/>
+          <p:cNvSpPr txBox="1"/>
+          <p:nvPr/>
+        </p:nvSpPr>
+        <p:spPr>
+          <a:xfrm>
+            <a:off x="10287000" y="256032"/>
+            <a:ext cx="1325880" cy="1188720"/>
+          </a:xfrm>
+          <a:prstGeom prst="rect">
+            <a:avLst/>
+          </a:prstGeom>
+          <a:noFill/>
+        </p:spPr>
+        <p:txBody>
+          <a:bodyPr wrap="square" anchor="t">
+            <a:spAutoFit/>
+          </a:bodyPr>
+          <a:lstStyle/>
+          <a:p>
+            <a:pPr algn="r">
+              <a:spcAft>
+                <a:spcPts val="0"/>
+              </a:spcAft>
+            </a:pPr>
+            <a:r>
+              <a:rPr sz="5200" b="1" i="0">
+                <a:solidFill>
+                  <a:srgbClr val="5A4C24"/>
+                </a:solidFill>
+                <a:latin typeface="Georgia"/>
+              </a:rPr>
+              <a:t>05</a:t>
+            </a:r>
+          </a:p>
+        </p:txBody>
+      </p:sp>
+      <p:sp>
+        <p:nvSpPr>
+          <p:cNvPr id="7" name="BIL0"/>
           <p:cNvSpPr/>
           <p:nvPr/>
         </p:nvSpPr>
@@ -8647,7 +9424,7 @@
       </p:sp>
       <p:sp>
         <p:nvSpPr>
-          <p:cNvPr id="7" name="TextBox 6"/>
+          <p:cNvPr id="8" name="TextBox 7"/>
           <p:cNvSpPr txBox="1"/>
           <p:nvPr/>
         </p:nvSpPr>
@@ -8712,7 +9489,7 @@
       </p:sp>
       <p:sp>
         <p:nvSpPr>
-          <p:cNvPr id="8" name="BIL1"/>
+          <p:cNvPr id="9" name="BIL1"/>
           <p:cNvSpPr/>
           <p:nvPr/>
         </p:nvSpPr>
@@ -8759,7 +9536,7 @@
       </p:sp>
       <p:sp>
         <p:nvSpPr>
-          <p:cNvPr id="9" name="TextBox 8"/>
+          <p:cNvPr id="10" name="TextBox 9"/>
           <p:cNvSpPr txBox="1"/>
           <p:nvPr/>
         </p:nvSpPr>
@@ -8824,7 +9601,7 @@
       </p:sp>
       <p:sp>
         <p:nvSpPr>
-          <p:cNvPr id="10" name="BIL2"/>
+          <p:cNvPr id="11" name="BIL2"/>
           <p:cNvSpPr/>
           <p:nvPr/>
         </p:nvSpPr>
@@ -8871,7 +9648,7 @@
       </p:sp>
       <p:sp>
         <p:nvSpPr>
-          <p:cNvPr id="11" name="TextBox 10"/>
+          <p:cNvPr id="12" name="TextBox 11"/>
           <p:cNvSpPr txBox="1"/>
           <p:nvPr/>
         </p:nvSpPr>
@@ -8936,7 +9713,7 @@
       </p:sp>
       <p:sp>
         <p:nvSpPr>
-          <p:cNvPr id="12" name="BIL3"/>
+          <p:cNvPr id="13" name="BIL3"/>
           <p:cNvSpPr/>
           <p:nvPr/>
         </p:nvSpPr>
@@ -8983,7 +9760,7 @@
       </p:sp>
       <p:sp>
         <p:nvSpPr>
-          <p:cNvPr id="13" name="TextBox 12"/>
+          <p:cNvPr id="14" name="TextBox 13"/>
           <p:cNvSpPr txBox="1"/>
           <p:nvPr/>
         </p:nvSpPr>
@@ -9015,7 +9792,7 @@
                 </a:solidFill>
                 <a:latin typeface="Georgia"/>
               </a:rPr>
-              <a:t>102</a:t>
+              <a:t>104</a:t>
             </a:r>
           </a:p>
           <a:p>
@@ -9048,7 +9825,7 @@
       </p:sp>
       <p:sp>
         <p:nvSpPr>
-          <p:cNvPr id="14" name="TextBox 13"/>
+          <p:cNvPr id="15" name="TextBox 14"/>
           <p:cNvSpPr txBox="1"/>
           <p:nvPr/>
         </p:nvSpPr>
@@ -9087,7 +9864,7 @@
       </p:sp>
       <p:sp>
         <p:nvSpPr>
-          <p:cNvPr id="15" name="!!FOOT"/>
+          <p:cNvPr id="16" name="!!FOOT"/>
           <p:cNvSpPr txBox="1"/>
           <p:nvPr/>
         </p:nvSpPr>
@@ -9126,7 +9903,7 @@
       </p:sp>
       <p:sp>
         <p:nvSpPr>
-          <p:cNvPr id="16" name="!!NUM"/>
+          <p:cNvPr id="17" name="!!NUM"/>
           <p:cNvSpPr txBox="1"/>
           <p:nvPr/>
         </p:nvSpPr>
@@ -9244,8 +10021,8 @@
         </p:nvSpPr>
         <p:spPr>
           <a:xfrm>
-            <a:off x="914400" y="1097280"/>
-            <a:ext cx="10360152" cy="457200"/>
+            <a:off x="640080" y="292608"/>
+            <a:ext cx="9509760" cy="329184"/>
           </a:xfrm>
           <a:prstGeom prst="rect">
             <a:avLst/>
@@ -9258,9 +10035,9 @@
           </a:bodyPr>
           <a:lstStyle/>
           <a:p>
-            <a:pPr algn="ctr">
-              <a:spcAft>
-                <a:spcPts val="600"/>
+            <a:pPr algn="l">
+              <a:spcAft>
+                <a:spcPts val="200"/>
               </a:spcAft>
             </a:pPr>
             <a:r>
@@ -9270,7 +10047,7 @@
                 </a:solidFill>
                 <a:latin typeface="Calibri"/>
               </a:rPr>
-              <a:t>05  ·  PERSPECTIVES</a:t>
+              <a:t>05  ·  DÉMONSTRATION</a:t>
             </a:r>
           </a:p>
         </p:txBody>
@@ -9283,8 +10060,8 @@
         </p:nvSpPr>
         <p:spPr>
           <a:xfrm>
-            <a:off x="914400" y="1463040"/>
-            <a:ext cx="10360152" cy="914400"/>
+            <a:off x="640080" y="658368"/>
+            <a:ext cx="9509760" cy="822960"/>
           </a:xfrm>
           <a:prstGeom prst="rect">
             <a:avLst/>
@@ -9297,19 +10074,19 @@
           </a:bodyPr>
           <a:lstStyle/>
           <a:p>
-            <a:pPr algn="ctr">
-              <a:spcAft>
-                <a:spcPts val="600"/>
-              </a:spcAft>
-            </a:pPr>
-            <a:r>
-              <a:rPr sz="3800" b="1" i="0">
+            <a:pPr algn="l">
+              <a:spcAft>
+                <a:spcPts val="200"/>
+              </a:spcAft>
+            </a:pPr>
+            <a:r>
+              <a:rPr sz="3000" b="1" i="0">
                 <a:solidFill>
                   <a:srgbClr val="F3ECDD"/>
                 </a:solidFill>
                 <a:latin typeface="Georgia"/>
               </a:rPr>
-              <a:t>Merci de votre attention</a:t>
+              <a:t>La preuve par l'écran</a:t>
             </a:r>
           </a:p>
         </p:txBody>
@@ -9322,8 +10099,8 @@
         </p:nvSpPr>
         <p:spPr>
           <a:xfrm>
-            <a:off x="5641848" y="2514600"/>
-            <a:ext cx="914400" cy="38100"/>
+            <a:off x="640080" y="1481328"/>
+            <a:ext cx="1463040" cy="38100"/>
           </a:xfrm>
           <a:prstGeom prst="rect">
             <a:avLst/>
@@ -9359,14 +10136,14 @@
       </p:sp>
       <p:sp>
         <p:nvSpPr>
-          <p:cNvPr id="6" name="TextBox 5"/>
+          <p:cNvPr id="6" name="!!GHOST"/>
           <p:cNvSpPr txBox="1"/>
           <p:nvPr/>
         </p:nvSpPr>
         <p:spPr>
           <a:xfrm>
-            <a:off x="2286000" y="2834640"/>
-            <a:ext cx="7616952" cy="1188720"/>
+            <a:off x="10287000" y="256032"/>
+            <a:ext cx="1325880" cy="1188720"/>
           </a:xfrm>
           <a:prstGeom prst="rect">
             <a:avLst/>
@@ -9379,33 +10156,80 @@
           </a:bodyPr>
           <a:lstStyle/>
           <a:p>
-            <a:pPr algn="ctr">
-              <a:spcAft>
-                <a:spcPts val="600"/>
-              </a:spcAft>
-            </a:pPr>
-            <a:r>
-              <a:rPr sz="1500" b="0" i="0">
-                <a:solidFill>
-                  <a:srgbClr val="B9AC93"/>
-                </a:solidFill>
-                <a:latin typeface="Calibri"/>
-              </a:rPr>
-              <a:t>Paiement en ligne  ·  version arabe complète  ·  recommandations personnalisées  ·  application mobile</a:t>
-            </a:r>
-          </a:p>
-        </p:txBody>
-      </p:sp>
-      <p:sp>
-        <p:nvSpPr>
-          <p:cNvPr id="7" name="TextBox 6"/>
+            <a:pPr algn="r">
+              <a:spcAft>
+                <a:spcPts val="0"/>
+              </a:spcAft>
+            </a:pPr>
+            <a:r>
+              <a:rPr sz="5200" b="1" i="0">
+                <a:solidFill>
+                  <a:srgbClr val="5A4C24"/>
+                </a:solidFill>
+                <a:latin typeface="Georgia"/>
+              </a:rPr>
+              <a:t>05</a:t>
+            </a:r>
+          </a:p>
+        </p:txBody>
+      </p:sp>
+      <p:sp>
+        <p:nvSpPr>
+          <p:cNvPr id="7" name="DEMOL"/>
+          <p:cNvSpPr/>
+          <p:nvPr/>
+        </p:nvSpPr>
+        <p:spPr>
+          <a:xfrm>
+            <a:off x="640080" y="1828800"/>
+            <a:ext cx="6675120" cy="4297680"/>
+          </a:xfrm>
+          <a:prstGeom prst="roundRect">
+            <a:avLst>
+              <a:gd name="adj" fmla="val 7000"/>
+            </a:avLst>
+          </a:prstGeom>
+          <a:solidFill>
+            <a:srgbClr val="2C251B"/>
+          </a:solidFill>
+          <a:ln w="12700">
+            <a:solidFill>
+              <a:srgbClr val="9A7B3F"/>
+            </a:solidFill>
+          </a:ln>
+        </p:spPr>
+        <p:style>
+          <a:lnRef idx="1">
+            <a:schemeClr val="accent1"/>
+          </a:lnRef>
+          <a:fillRef idx="3">
+            <a:schemeClr val="accent1"/>
+          </a:fillRef>
+          <a:effectRef idx="2">
+            <a:schemeClr val="accent1"/>
+          </a:effectRef>
+          <a:fontRef idx="minor">
+            <a:schemeClr val="lt1"/>
+          </a:fontRef>
+        </p:style>
+        <p:txBody>
+          <a:bodyPr rtlCol="0" anchor="ctr"/>
+          <a:lstStyle/>
+          <a:p>
+            <a:pPr algn="ctr"/>
+          </a:p>
+        </p:txBody>
+      </p:sp>
+      <p:sp>
+        <p:nvSpPr>
+          <p:cNvPr id="8" name="TextBox 7"/>
           <p:cNvSpPr txBox="1"/>
           <p:nvPr/>
         </p:nvSpPr>
         <p:spPr>
           <a:xfrm>
-            <a:off x="2286000" y="4114800"/>
-            <a:ext cx="7616952" cy="640080"/>
+            <a:off x="914400" y="1965960"/>
+            <a:ext cx="6126480" cy="4023360"/>
           </a:xfrm>
           <a:prstGeom prst="rect">
             <a:avLst/>
@@ -9418,12 +10242,628 @@
           </a:bodyPr>
           <a:lstStyle/>
           <a:p>
+            <a:pPr algn="l">
+              <a:spcAft>
+                <a:spcPts val="600"/>
+              </a:spcAft>
+            </a:pPr>
+            <a:r>
+              <a:rPr sz="1900" b="1" i="0">
+                <a:solidFill>
+                  <a:srgbClr val="C9A959"/>
+                </a:solidFill>
+                <a:latin typeface="Calibri"/>
+              </a:rPr>
+              <a:t>Scénario — 6 minutes</a:t>
+            </a:r>
+          </a:p>
+          <a:p>
+            <a:pPr algn="l">
+              <a:spcAft>
+                <a:spcPts val="600"/>
+              </a:spcAft>
+            </a:pPr>
+            <a:r>
+              <a:rPr sz="1500" b="0" i="0">
+                <a:solidFill>
+                  <a:srgbClr val="F3ECDD"/>
+                </a:solidFill>
+                <a:latin typeface="Calibri"/>
+              </a:rPr>
+              <a:t>1. Acheter : recherche « solaire », fiche produit, panier, tunnel, confirmation.</a:t>
+            </a:r>
+            <a:br/>
+            <a:r>
+              <a:rPr sz="1500" b="0" i="0">
+                <a:solidFill>
+                  <a:srgbClr val="F3ECDD"/>
+                </a:solidFill>
+                <a:latin typeface="Calibri"/>
+              </a:rPr>
+              <a:t>2. Piloter : la commande tombe au dashboard, avance Confirmée → Expédiée.</a:t>
+            </a:r>
+            <a:br/>
+            <a:r>
+              <a:rPr sz="1500" b="0" i="0">
+                <a:solidFill>
+                  <a:srgbClr val="F3ECDD"/>
+                </a:solidFill>
+                <a:latin typeface="Calibri"/>
+              </a:rPr>
+              <a:t>3. Rassurer : timeline client, avis modéré, ticket support clôturé.</a:t>
+            </a:r>
+          </a:p>
+        </p:txBody>
+      </p:sp>
+      <p:sp>
+        <p:nvSpPr>
+          <p:cNvPr id="9" name="DEMOR"/>
+          <p:cNvSpPr/>
+          <p:nvPr/>
+        </p:nvSpPr>
+        <p:spPr>
+          <a:xfrm>
+            <a:off x="7589520" y="1828800"/>
+            <a:ext cx="3685032" cy="4297680"/>
+          </a:xfrm>
+          <a:prstGeom prst="roundRect">
+            <a:avLst>
+              <a:gd name="adj" fmla="val 7000"/>
+            </a:avLst>
+          </a:prstGeom>
+          <a:solidFill>
+            <a:srgbClr val="2C251B"/>
+          </a:solidFill>
+          <a:ln w="12700">
+            <a:solidFill>
+              <a:srgbClr val="9A7B3F"/>
+            </a:solidFill>
+          </a:ln>
+        </p:spPr>
+        <p:style>
+          <a:lnRef idx="1">
+            <a:schemeClr val="accent1"/>
+          </a:lnRef>
+          <a:fillRef idx="3">
+            <a:schemeClr val="accent1"/>
+          </a:fillRef>
+          <a:effectRef idx="2">
+            <a:schemeClr val="accent1"/>
+          </a:effectRef>
+          <a:fontRef idx="minor">
+            <a:schemeClr val="lt1"/>
+          </a:fontRef>
+        </p:style>
+        <p:txBody>
+          <a:bodyPr rtlCol="0" anchor="ctr"/>
+          <a:lstStyle/>
+          <a:p>
+            <a:pPr algn="ctr"/>
+          </a:p>
+        </p:txBody>
+      </p:sp>
+      <p:sp>
+        <p:nvSpPr>
+          <p:cNvPr id="10" name="TextBox 9"/>
+          <p:cNvSpPr txBox="1"/>
+          <p:nvPr/>
+        </p:nvSpPr>
+        <p:spPr>
+          <a:xfrm>
+            <a:off x="7818120" y="1965960"/>
+            <a:ext cx="3227832" cy="4023360"/>
+          </a:xfrm>
+          <a:prstGeom prst="rect">
+            <a:avLst/>
+          </a:prstGeom>
+          <a:noFill/>
+        </p:spPr>
+        <p:txBody>
+          <a:bodyPr wrap="square" anchor="t">
+            <a:spAutoFit/>
+          </a:bodyPr>
+          <a:lstStyle/>
+          <a:p>
             <a:pPr algn="ctr">
               <a:spcAft>
+                <a:spcPts val="500"/>
+              </a:spcAft>
+            </a:pPr>
+            <a:r>
+              <a:rPr sz="1700" b="1" i="0">
+                <a:solidFill>
+                  <a:srgbClr val="C9A959"/>
+                </a:solidFill>
+                <a:latin typeface="Calibri"/>
+              </a:rPr>
+              <a:t>Accès recette</a:t>
+            </a:r>
+          </a:p>
+          <a:p>
+            <a:pPr algn="ctr">
+              <a:spcAft>
+                <a:spcPts val="500"/>
+              </a:spcAft>
+            </a:pPr>
+            <a:r>
+              <a:rPr sz="1400" b="0" i="0">
+                <a:solidFill>
+                  <a:srgbClr val="B9AC93"/>
+                </a:solidFill>
+                <a:latin typeface="Calibri"/>
+              </a:rPr>
+              <a:t>[Collez ici le QR]</a:t>
+            </a:r>
+          </a:p>
+          <a:p>
+            <a:pPr algn="ctr">
+              <a:spcAft>
+                <a:spcPts val="500"/>
+              </a:spcAft>
+            </a:pPr>
+            <a:r>
+              <a:rPr sz="1400" b="1" i="0">
+                <a:solidFill>
+                  <a:srgbClr val="F3ECDD"/>
+                </a:solidFill>
+                <a:latin typeface="Calibri"/>
+              </a:rPr>
+              <a:t>https://[recette].tn</a:t>
+            </a:r>
+          </a:p>
+          <a:p>
+            <a:pPr algn="ctr">
+              <a:spcAft>
+                <a:spcPts val="500"/>
+              </a:spcAft>
+            </a:pPr>
+            <a:r>
+              <a:rPr sz="1300" b="0" i="0">
+                <a:solidFill>
+                  <a:srgbClr val="B9AC93"/>
+                </a:solidFill>
+                <a:latin typeface="Calibri"/>
+              </a:rPr>
+              <a:t>client : [e-mail] / [mdp]</a:t>
+            </a:r>
+            <a:br/>
+            <a:r>
+              <a:rPr sz="1300" b="0" i="0">
+                <a:solidFill>
+                  <a:srgbClr val="B9AC93"/>
+                </a:solidFill>
+                <a:latin typeface="Calibri"/>
+              </a:rPr>
+              <a:t>admin : [e-mail] / [mdp]</a:t>
+            </a:r>
+          </a:p>
+        </p:txBody>
+      </p:sp>
+      <p:sp>
+        <p:nvSpPr>
+          <p:cNvPr id="11" name="!!FOOT"/>
+          <p:cNvSpPr txBox="1"/>
+          <p:nvPr/>
+        </p:nvSpPr>
+        <p:spPr>
+          <a:xfrm>
+            <a:off x="640080" y="6419088"/>
+            <a:ext cx="5486400" cy="320040"/>
+          </a:xfrm>
+          <a:prstGeom prst="rect">
+            <a:avLst/>
+          </a:prstGeom>
+          <a:noFill/>
+        </p:spPr>
+        <p:txBody>
+          <a:bodyPr wrap="square" anchor="t">
+            <a:spAutoFit/>
+          </a:bodyPr>
+          <a:lstStyle/>
+          <a:p>
+            <a:pPr algn="l">
+              <a:spcAft>
                 <a:spcPts val="600"/>
               </a:spcAft>
             </a:pPr>
             <a:r>
+              <a:rPr sz="1100" b="0" i="0">
+                <a:solidFill>
+                  <a:srgbClr val="B9AC93"/>
+                </a:solidFill>
+                <a:latin typeface="Calibri"/>
+              </a:rPr>
+              <a:t>Cléopâtre · Soutenance PFE</a:t>
+            </a:r>
+          </a:p>
+        </p:txBody>
+      </p:sp>
+      <p:sp>
+        <p:nvSpPr>
+          <p:cNvPr id="12" name="!!NUM"/>
+          <p:cNvSpPr txBox="1"/>
+          <p:nvPr/>
+        </p:nvSpPr>
+        <p:spPr>
+          <a:xfrm>
+            <a:off x="10972800" y="6419088"/>
+            <a:ext cx="640080" cy="320040"/>
+          </a:xfrm>
+          <a:prstGeom prst="rect">
+            <a:avLst/>
+          </a:prstGeom>
+          <a:noFill/>
+        </p:spPr>
+        <p:txBody>
+          <a:bodyPr wrap="square" anchor="t">
+            <a:spAutoFit/>
+          </a:bodyPr>
+          <a:lstStyle/>
+          <a:p>
+            <a:pPr algn="r">
+              <a:spcAft>
+                <a:spcPts val="600"/>
+              </a:spcAft>
+            </a:pPr>
+            <a:r>
+              <a:rPr sz="1100" b="0" i="0">
+                <a:solidFill>
+                  <a:srgbClr val="B9AC93"/>
+                </a:solidFill>
+                <a:latin typeface="Calibri"/>
+              </a:rPr>
+              <a:t>18</a:t>
+            </a:r>
+          </a:p>
+        </p:txBody>
+      </p:sp>
+    </p:spTree>
+  </p:cSld>
+  <p:clrMapOvr>
+    <a:masterClrMapping/>
+  </p:clrMapOvr>
+  <mc:AlternateContent xmlns:mc="http://schemas.openxmlformats.org/markup-compatibility/2006" xmlns:p14="http://schemas.microsoft.com/office/powerpoint/2010/main" xmlns:p159="http://schemas.microsoft.com/office/powerpoint/2015/09/main">
+    <mc:Choice Requires="p159">
+      <p:transition spd="med" advOnClk="1" p14:dur="900">
+        <p159:morph option="byObject"/>
+      </p:transition>
+    </mc:Choice>
+    <mc:Fallback>
+      <p:transition spd="med">
+        <p:fade thruBlk="1"/>
+      </p:transition>
+    </mc:Fallback>
+  </mc:AlternateContent>
+</p:sld>
+</file>
+
+<file path=ppt/slides/slide19.xml><?xml version="1.0" encoding="utf-8"?>
+<p:sld xmlns:a="http://schemas.openxmlformats.org/drawingml/2006/main" xmlns:p="http://schemas.openxmlformats.org/presentationml/2006/main" xmlns:r="http://schemas.openxmlformats.org/officeDocument/2006/relationships">
+  <p:cSld>
+    <p:spTree>
+      <p:nvGrpSpPr>
+        <p:cNvPr id="1" name=""/>
+        <p:cNvGrpSpPr/>
+        <p:nvPr/>
+      </p:nvGrpSpPr>
+      <p:grpSpPr/>
+      <p:sp>
+        <p:nvSpPr>
+          <p:cNvPr id="2" name="!!BG"/>
+          <p:cNvSpPr/>
+          <p:nvPr/>
+        </p:nvSpPr>
+        <p:spPr>
+          <a:xfrm>
+            <a:off x="0" y="0"/>
+            <a:ext cx="12191695" cy="6858000"/>
+          </a:xfrm>
+          <a:prstGeom prst="rect">
+            <a:avLst/>
+          </a:prstGeom>
+          <a:solidFill>
+            <a:srgbClr val="201A13"/>
+          </a:solidFill>
+          <a:ln>
+            <a:noFill/>
+          </a:ln>
+        </p:spPr>
+        <p:style>
+          <a:lnRef idx="1">
+            <a:schemeClr val="accent1"/>
+          </a:lnRef>
+          <a:fillRef idx="3">
+            <a:schemeClr val="accent1"/>
+          </a:fillRef>
+          <a:effectRef idx="2">
+            <a:schemeClr val="accent1"/>
+          </a:effectRef>
+          <a:fontRef idx="minor">
+            <a:schemeClr val="lt1"/>
+          </a:fontRef>
+        </p:style>
+        <p:txBody>
+          <a:bodyPr rtlCol="0" anchor="ctr"/>
+          <a:lstStyle/>
+          <a:p>
+            <a:pPr algn="ctr"/>
+          </a:p>
+        </p:txBody>
+      </p:sp>
+      <p:sp>
+        <p:nvSpPr>
+          <p:cNvPr id="3" name="!!FRAME"/>
+          <p:cNvSpPr/>
+          <p:nvPr/>
+        </p:nvSpPr>
+        <p:spPr>
+          <a:xfrm>
+            <a:off x="146304" y="146304"/>
+            <a:ext cx="11899087" cy="6565392"/>
+          </a:xfrm>
+          <a:prstGeom prst="rect">
+            <a:avLst/>
+          </a:prstGeom>
+          <a:noFill/>
+          <a:ln w="25400">
+            <a:solidFill>
+              <a:srgbClr val="C9A959"/>
+            </a:solidFill>
+          </a:ln>
+        </p:spPr>
+        <p:style>
+          <a:lnRef idx="1">
+            <a:schemeClr val="accent1"/>
+          </a:lnRef>
+          <a:fillRef idx="3">
+            <a:schemeClr val="accent1"/>
+          </a:fillRef>
+          <a:effectRef idx="2">
+            <a:schemeClr val="accent1"/>
+          </a:effectRef>
+          <a:fontRef idx="minor">
+            <a:schemeClr val="lt1"/>
+          </a:fontRef>
+        </p:style>
+        <p:txBody>
+          <a:bodyPr rtlCol="0" anchor="ctr"/>
+          <a:lstStyle/>
+          <a:p>
+            <a:pPr algn="ctr"/>
+          </a:p>
+        </p:txBody>
+      </p:sp>
+      <p:sp>
+        <p:nvSpPr>
+          <p:cNvPr id="4" name="!!FRAME"/>
+          <p:cNvSpPr/>
+          <p:nvPr/>
+        </p:nvSpPr>
+        <p:spPr>
+          <a:xfrm>
+            <a:off x="237744" y="237744"/>
+            <a:ext cx="11716207" cy="6382512"/>
+          </a:xfrm>
+          <a:prstGeom prst="rect">
+            <a:avLst/>
+          </a:prstGeom>
+          <a:noFill/>
+          <a:ln w="9525">
+            <a:solidFill>
+              <a:srgbClr val="C9A959"/>
+            </a:solidFill>
+          </a:ln>
+        </p:spPr>
+        <p:style>
+          <a:lnRef idx="1">
+            <a:schemeClr val="accent1"/>
+          </a:lnRef>
+          <a:fillRef idx="3">
+            <a:schemeClr val="accent1"/>
+          </a:fillRef>
+          <a:effectRef idx="2">
+            <a:schemeClr val="accent1"/>
+          </a:effectRef>
+          <a:fontRef idx="minor">
+            <a:schemeClr val="lt1"/>
+          </a:fontRef>
+        </p:style>
+        <p:txBody>
+          <a:bodyPr rtlCol="0" anchor="ctr"/>
+          <a:lstStyle/>
+          <a:p>
+            <a:pPr algn="ctr"/>
+          </a:p>
+        </p:txBody>
+      </p:sp>
+      <p:sp>
+        <p:nvSpPr>
+          <p:cNvPr id="5" name="!!EYE"/>
+          <p:cNvSpPr txBox="1"/>
+          <p:nvPr/>
+        </p:nvSpPr>
+        <p:spPr>
+          <a:xfrm>
+            <a:off x="914400" y="1097280"/>
+            <a:ext cx="10360152" cy="320040"/>
+          </a:xfrm>
+          <a:prstGeom prst="rect">
+            <a:avLst/>
+          </a:prstGeom>
+          <a:noFill/>
+        </p:spPr>
+        <p:txBody>
+          <a:bodyPr wrap="square" anchor="t">
+            <a:spAutoFit/>
+          </a:bodyPr>
+          <a:lstStyle/>
+          <a:p>
+            <a:pPr algn="ctr">
+              <a:spcAft>
+                <a:spcPts val="600"/>
+              </a:spcAft>
+            </a:pPr>
+            <a:r>
+              <a:rPr sz="1300" b="1" i="0">
+                <a:solidFill>
+                  <a:srgbClr val="C9A959"/>
+                </a:solidFill>
+                <a:latin typeface="Calibri"/>
+              </a:rPr>
+              <a:t>05  ·  PERSPECTIVES</a:t>
+            </a:r>
+          </a:p>
+        </p:txBody>
+      </p:sp>
+      <p:sp>
+        <p:nvSpPr>
+          <p:cNvPr id="6" name="!!TITLE"/>
+          <p:cNvSpPr txBox="1"/>
+          <p:nvPr/>
+        </p:nvSpPr>
+        <p:spPr>
+          <a:xfrm>
+            <a:off x="914400" y="1463040"/>
+            <a:ext cx="10360152" cy="914400"/>
+          </a:xfrm>
+          <a:prstGeom prst="rect">
+            <a:avLst/>
+          </a:prstGeom>
+          <a:noFill/>
+        </p:spPr>
+        <p:txBody>
+          <a:bodyPr wrap="square" anchor="t">
+            <a:spAutoFit/>
+          </a:bodyPr>
+          <a:lstStyle/>
+          <a:p>
+            <a:pPr algn="ctr">
+              <a:spcAft>
+                <a:spcPts val="600"/>
+              </a:spcAft>
+            </a:pPr>
+            <a:r>
+              <a:rPr sz="3800" b="1" i="0">
+                <a:solidFill>
+                  <a:srgbClr val="F3ECDD"/>
+                </a:solidFill>
+                <a:latin typeface="Georgia"/>
+              </a:rPr>
+              <a:t>Merci de votre attention</a:t>
+            </a:r>
+          </a:p>
+        </p:txBody>
+      </p:sp>
+      <p:sp>
+        <p:nvSpPr>
+          <p:cNvPr id="7" name="!!RULE"/>
+          <p:cNvSpPr/>
+          <p:nvPr/>
+        </p:nvSpPr>
+        <p:spPr>
+          <a:xfrm>
+            <a:off x="5641848" y="2514600"/>
+            <a:ext cx="914400" cy="38100"/>
+          </a:xfrm>
+          <a:prstGeom prst="rect">
+            <a:avLst/>
+          </a:prstGeom>
+          <a:solidFill>
+            <a:srgbClr val="C9A959"/>
+          </a:solidFill>
+          <a:ln>
+            <a:noFill/>
+          </a:ln>
+        </p:spPr>
+        <p:style>
+          <a:lnRef idx="1">
+            <a:schemeClr val="accent1"/>
+          </a:lnRef>
+          <a:fillRef idx="3">
+            <a:schemeClr val="accent1"/>
+          </a:fillRef>
+          <a:effectRef idx="2">
+            <a:schemeClr val="accent1"/>
+          </a:effectRef>
+          <a:fontRef idx="minor">
+            <a:schemeClr val="lt1"/>
+          </a:fontRef>
+        </p:style>
+        <p:txBody>
+          <a:bodyPr rtlCol="0" anchor="ctr"/>
+          <a:lstStyle/>
+          <a:p>
+            <a:pPr algn="ctr"/>
+          </a:p>
+        </p:txBody>
+      </p:sp>
+      <p:sp>
+        <p:nvSpPr>
+          <p:cNvPr id="8" name="TextBox 7"/>
+          <p:cNvSpPr txBox="1"/>
+          <p:nvPr/>
+        </p:nvSpPr>
+        <p:spPr>
+          <a:xfrm>
+            <a:off x="2286000" y="2834640"/>
+            <a:ext cx="7616952" cy="1188720"/>
+          </a:xfrm>
+          <a:prstGeom prst="rect">
+            <a:avLst/>
+          </a:prstGeom>
+          <a:noFill/>
+        </p:spPr>
+        <p:txBody>
+          <a:bodyPr wrap="square" anchor="t">
+            <a:spAutoFit/>
+          </a:bodyPr>
+          <a:lstStyle/>
+          <a:p>
+            <a:pPr algn="ctr">
+              <a:spcAft>
+                <a:spcPts val="600"/>
+              </a:spcAft>
+            </a:pPr>
+            <a:r>
+              <a:rPr sz="1500" b="0" i="0">
+                <a:solidFill>
+                  <a:srgbClr val="B9AC93"/>
+                </a:solidFill>
+                <a:latin typeface="Calibri"/>
+              </a:rPr>
+              <a:t>Paiement en ligne  ·  version arabe complète  ·  recommandations personnalisées  ·  application mobile</a:t>
+            </a:r>
+          </a:p>
+        </p:txBody>
+      </p:sp>
+      <p:sp>
+        <p:nvSpPr>
+          <p:cNvPr id="9" name="TextBox 8"/>
+          <p:cNvSpPr txBox="1"/>
+          <p:nvPr/>
+        </p:nvSpPr>
+        <p:spPr>
+          <a:xfrm>
+            <a:off x="2286000" y="4114800"/>
+            <a:ext cx="7616952" cy="640080"/>
+          </a:xfrm>
+          <a:prstGeom prst="rect">
+            <a:avLst/>
+          </a:prstGeom>
+          <a:noFill/>
+        </p:spPr>
+        <p:txBody>
+          <a:bodyPr wrap="square" anchor="t">
+            <a:spAutoFit/>
+          </a:bodyPr>
+          <a:lstStyle/>
+          <a:p>
+            <a:pPr algn="ctr">
+              <a:spcAft>
+                <a:spcPts val="600"/>
+              </a:spcAft>
+            </a:pPr>
+            <a:r>
               <a:rPr sz="2200" b="1" i="0">
                 <a:solidFill>
                   <a:srgbClr val="C9A959"/>
@@ -9437,7 +10877,7 @@
       </p:sp>
       <p:sp>
         <p:nvSpPr>
-          <p:cNvPr id="8" name="TextBox 7"/>
+          <p:cNvPr id="10" name="TextBox 9"/>
           <p:cNvSpPr txBox="1"/>
           <p:nvPr/>
         </p:nvSpPr>
@@ -9556,7 +10996,7 @@
         <p:spPr>
           <a:xfrm>
             <a:off x="640080" y="292608"/>
-            <a:ext cx="10881360" cy="329184"/>
+            <a:ext cx="9509760" cy="329184"/>
           </a:xfrm>
           <a:prstGeom prst="rect">
             <a:avLst/>
@@ -9595,7 +11035,7 @@
         <p:spPr>
           <a:xfrm>
             <a:off x="640080" y="658368"/>
-            <a:ext cx="10881360" cy="822960"/>
+            <a:ext cx="9509760" cy="822960"/>
           </a:xfrm>
           <a:prstGeom prst="rect">
             <a:avLst/>
@@ -10447,6 +11887,1405 @@
                 <a:latin typeface="Calibri"/>
               </a:rPr>
               <a:t>02</a:t>
+            </a:r>
+          </a:p>
+        </p:txBody>
+      </p:sp>
+    </p:spTree>
+  </p:cSld>
+  <p:clrMapOvr>
+    <a:masterClrMapping/>
+  </p:clrMapOvr>
+  <mc:AlternateContent xmlns:mc="http://schemas.openxmlformats.org/markup-compatibility/2006" xmlns:p14="http://schemas.microsoft.com/office/powerpoint/2010/main" xmlns:p159="http://schemas.microsoft.com/office/powerpoint/2015/09/main">
+    <mc:Choice Requires="p159">
+      <p:transition spd="med" advOnClk="1" p14:dur="900">
+        <p159:morph option="byObject"/>
+      </p:transition>
+    </mc:Choice>
+    <mc:Fallback>
+      <p:transition spd="med">
+        <p:fade thruBlk="1"/>
+      </p:transition>
+    </mc:Fallback>
+  </mc:AlternateContent>
+</p:sld>
+</file>
+
+<file path=ppt/slides/slide20.xml><?xml version="1.0" encoding="utf-8"?>
+<p:sld xmlns:a="http://schemas.openxmlformats.org/drawingml/2006/main" xmlns:p="http://schemas.openxmlformats.org/presentationml/2006/main" xmlns:r="http://schemas.openxmlformats.org/officeDocument/2006/relationships">
+  <p:cSld>
+    <p:spTree>
+      <p:nvGrpSpPr>
+        <p:cNvPr id="1" name=""/>
+        <p:cNvGrpSpPr/>
+        <p:nvPr/>
+      </p:nvGrpSpPr>
+      <p:grpSpPr/>
+      <p:sp>
+        <p:nvSpPr>
+          <p:cNvPr id="2" name="!!BG"/>
+          <p:cNvSpPr/>
+          <p:nvPr/>
+        </p:nvSpPr>
+        <p:spPr>
+          <a:xfrm>
+            <a:off x="0" y="0"/>
+            <a:ext cx="12191695" cy="6858000"/>
+          </a:xfrm>
+          <a:prstGeom prst="rect">
+            <a:avLst/>
+          </a:prstGeom>
+          <a:solidFill>
+            <a:srgbClr val="201A13"/>
+          </a:solidFill>
+          <a:ln>
+            <a:noFill/>
+          </a:ln>
+        </p:spPr>
+        <p:style>
+          <a:lnRef idx="1">
+            <a:schemeClr val="accent1"/>
+          </a:lnRef>
+          <a:fillRef idx="3">
+            <a:schemeClr val="accent1"/>
+          </a:fillRef>
+          <a:effectRef idx="2">
+            <a:schemeClr val="accent1"/>
+          </a:effectRef>
+          <a:fontRef idx="minor">
+            <a:schemeClr val="lt1"/>
+          </a:fontRef>
+        </p:style>
+        <p:txBody>
+          <a:bodyPr rtlCol="0" anchor="ctr"/>
+          <a:lstStyle/>
+          <a:p>
+            <a:pPr algn="ctr"/>
+          </a:p>
+        </p:txBody>
+      </p:sp>
+      <p:sp>
+        <p:nvSpPr>
+          <p:cNvPr id="3" name="!!EYE"/>
+          <p:cNvSpPr txBox="1"/>
+          <p:nvPr/>
+        </p:nvSpPr>
+        <p:spPr>
+          <a:xfrm>
+            <a:off x="640080" y="292608"/>
+            <a:ext cx="9509760" cy="329184"/>
+          </a:xfrm>
+          <a:prstGeom prst="rect">
+            <a:avLst/>
+          </a:prstGeom>
+          <a:noFill/>
+        </p:spPr>
+        <p:txBody>
+          <a:bodyPr wrap="square" anchor="t">
+            <a:spAutoFit/>
+          </a:bodyPr>
+          <a:lstStyle/>
+          <a:p>
+            <a:pPr algn="l">
+              <a:spcAft>
+                <a:spcPts val="200"/>
+              </a:spcAft>
+            </a:pPr>
+            <a:r>
+              <a:rPr sz="1300" b="1" i="0">
+                <a:solidFill>
+                  <a:srgbClr val="C9A959"/>
+                </a:solidFill>
+                <a:latin typeface="Calibri"/>
+              </a:rPr>
+              <a:t>ANNEXE A1  ·  SECOURS JURY</a:t>
+            </a:r>
+          </a:p>
+        </p:txBody>
+      </p:sp>
+      <p:sp>
+        <p:nvSpPr>
+          <p:cNvPr id="4" name="!!TITLE"/>
+          <p:cNvSpPr txBox="1"/>
+          <p:nvPr/>
+        </p:nvSpPr>
+        <p:spPr>
+          <a:xfrm>
+            <a:off x="640080" y="658368"/>
+            <a:ext cx="9509760" cy="822960"/>
+          </a:xfrm>
+          <a:prstGeom prst="rect">
+            <a:avLst/>
+          </a:prstGeom>
+          <a:noFill/>
+        </p:spPr>
+        <p:txBody>
+          <a:bodyPr wrap="square" anchor="t">
+            <a:spAutoFit/>
+          </a:bodyPr>
+          <a:lstStyle/>
+          <a:p>
+            <a:pPr algn="l">
+              <a:spcAft>
+                <a:spcPts val="200"/>
+              </a:spcAft>
+            </a:pPr>
+            <a:r>
+              <a:rPr sz="3000" b="1" i="0">
+                <a:solidFill>
+                  <a:srgbClr val="F3ECDD"/>
+                </a:solidFill>
+                <a:latin typeface="Georgia"/>
+              </a:rPr>
+              <a:t>Cycle de vie d'une commande — machine à états</a:t>
+            </a:r>
+          </a:p>
+        </p:txBody>
+      </p:sp>
+      <p:sp>
+        <p:nvSpPr>
+          <p:cNvPr id="5" name="!!RULE"/>
+          <p:cNvSpPr/>
+          <p:nvPr/>
+        </p:nvSpPr>
+        <p:spPr>
+          <a:xfrm>
+            <a:off x="640080" y="1481328"/>
+            <a:ext cx="1463040" cy="38100"/>
+          </a:xfrm>
+          <a:prstGeom prst="rect">
+            <a:avLst/>
+          </a:prstGeom>
+          <a:solidFill>
+            <a:srgbClr val="C9A959"/>
+          </a:solidFill>
+          <a:ln>
+            <a:noFill/>
+          </a:ln>
+        </p:spPr>
+        <p:style>
+          <a:lnRef idx="1">
+            <a:schemeClr val="accent1"/>
+          </a:lnRef>
+          <a:fillRef idx="3">
+            <a:schemeClr val="accent1"/>
+          </a:fillRef>
+          <a:effectRef idx="2">
+            <a:schemeClr val="accent1"/>
+          </a:effectRef>
+          <a:fontRef idx="minor">
+            <a:schemeClr val="lt1"/>
+          </a:fontRef>
+        </p:style>
+        <p:txBody>
+          <a:bodyPr rtlCol="0" anchor="ctr"/>
+          <a:lstStyle/>
+          <a:p>
+            <a:pPr algn="ctr"/>
+          </a:p>
+        </p:txBody>
+      </p:sp>
+      <p:sp>
+        <p:nvSpPr>
+          <p:cNvPr id="6" name="!!GHOST"/>
+          <p:cNvSpPr txBox="1"/>
+          <p:nvPr/>
+        </p:nvSpPr>
+        <p:spPr>
+          <a:xfrm>
+            <a:off x="10287000" y="256032"/>
+            <a:ext cx="1325880" cy="1188720"/>
+          </a:xfrm>
+          <a:prstGeom prst="rect">
+            <a:avLst/>
+          </a:prstGeom>
+          <a:noFill/>
+        </p:spPr>
+        <p:txBody>
+          <a:bodyPr wrap="square" anchor="t">
+            <a:spAutoFit/>
+          </a:bodyPr>
+          <a:lstStyle/>
+          <a:p>
+            <a:pPr algn="r">
+              <a:spcAft>
+                <a:spcPts val="0"/>
+              </a:spcAft>
+            </a:pPr>
+            <a:r>
+              <a:rPr sz="5200" b="1" i="0">
+                <a:solidFill>
+                  <a:srgbClr val="5A4C24"/>
+                </a:solidFill>
+                <a:latin typeface="Georgia"/>
+              </a:rPr>
+              <a:t>A1</a:t>
+            </a:r>
+          </a:p>
+        </p:txBody>
+      </p:sp>
+      <p:pic>
+        <p:nvPicPr>
+          <p:cNvPr id="7" name="BK1" descr="fig49_statemachine.png"/>
+          <p:cNvPicPr>
+            <a:picLocks noChangeAspect="1"/>
+          </p:cNvPicPr>
+          <p:nvPr/>
+        </p:nvPicPr>
+        <p:blipFill>
+          <a:blip r:embed="rId2"/>
+          <a:stretch>
+            <a:fillRect/>
+          </a:stretch>
+        </p:blipFill>
+        <p:spPr>
+          <a:xfrm>
+            <a:off x="1790072" y="1737360"/>
+            <a:ext cx="8608807" cy="4434840"/>
+          </a:xfrm>
+          <a:ln w="15875">
+            <a:solidFill>
+              <a:srgbClr val="9A7B3F"/>
+            </a:solidFill>
+          </a:ln>
+          <a:prstGeom prst="roundRect">
+            <a:avLst>
+              <a:gd name="adj" fmla="val 9000"/>
+            </a:avLst>
+          </a:prstGeom>
+        </p:spPr>
+      </p:pic>
+      <p:sp>
+        <p:nvSpPr>
+          <p:cNvPr id="8" name="!!FOOT"/>
+          <p:cNvSpPr txBox="1"/>
+          <p:nvPr/>
+        </p:nvSpPr>
+        <p:spPr>
+          <a:xfrm>
+            <a:off x="640080" y="6419088"/>
+            <a:ext cx="5486400" cy="320040"/>
+          </a:xfrm>
+          <a:prstGeom prst="rect">
+            <a:avLst/>
+          </a:prstGeom>
+          <a:noFill/>
+        </p:spPr>
+        <p:txBody>
+          <a:bodyPr wrap="square" anchor="t">
+            <a:spAutoFit/>
+          </a:bodyPr>
+          <a:lstStyle/>
+          <a:p>
+            <a:pPr algn="l">
+              <a:spcAft>
+                <a:spcPts val="600"/>
+              </a:spcAft>
+            </a:pPr>
+            <a:r>
+              <a:rPr sz="1100" b="0" i="0">
+                <a:solidFill>
+                  <a:srgbClr val="B9AC93"/>
+                </a:solidFill>
+                <a:latin typeface="Calibri"/>
+              </a:rPr>
+              <a:t>Cléopâtre · Soutenance PFE — Annexe jury</a:t>
+            </a:r>
+          </a:p>
+        </p:txBody>
+      </p:sp>
+      <p:sp>
+        <p:nvSpPr>
+          <p:cNvPr id="9" name="!!NUM"/>
+          <p:cNvSpPr txBox="1"/>
+          <p:nvPr/>
+        </p:nvSpPr>
+        <p:spPr>
+          <a:xfrm>
+            <a:off x="10972800" y="6419088"/>
+            <a:ext cx="640080" cy="320040"/>
+          </a:xfrm>
+          <a:prstGeom prst="rect">
+            <a:avLst/>
+          </a:prstGeom>
+          <a:noFill/>
+        </p:spPr>
+        <p:txBody>
+          <a:bodyPr wrap="square" anchor="t">
+            <a:spAutoFit/>
+          </a:bodyPr>
+          <a:lstStyle/>
+          <a:p>
+            <a:pPr algn="r">
+              <a:spcAft>
+                <a:spcPts val="600"/>
+              </a:spcAft>
+            </a:pPr>
+            <a:r>
+              <a:rPr sz="1100" b="0" i="0">
+                <a:solidFill>
+                  <a:srgbClr val="B9AC93"/>
+                </a:solidFill>
+                <a:latin typeface="Calibri"/>
+              </a:rPr>
+              <a:t>A1</a:t>
+            </a:r>
+          </a:p>
+        </p:txBody>
+      </p:sp>
+    </p:spTree>
+  </p:cSld>
+  <p:clrMapOvr>
+    <a:masterClrMapping/>
+  </p:clrMapOvr>
+  <mc:AlternateContent xmlns:mc="http://schemas.openxmlformats.org/markup-compatibility/2006" xmlns:p14="http://schemas.microsoft.com/office/powerpoint/2010/main" xmlns:p159="http://schemas.microsoft.com/office/powerpoint/2015/09/main">
+    <mc:Choice Requires="p159">
+      <p:transition spd="med" advOnClk="1" p14:dur="900">
+        <p159:morph option="byObject"/>
+      </p:transition>
+    </mc:Choice>
+    <mc:Fallback>
+      <p:transition spd="med">
+        <p:fade thruBlk="1"/>
+      </p:transition>
+    </mc:Fallback>
+  </mc:AlternateContent>
+</p:sld>
+</file>
+
+<file path=ppt/slides/slide21.xml><?xml version="1.0" encoding="utf-8"?>
+<p:sld xmlns:a="http://schemas.openxmlformats.org/drawingml/2006/main" xmlns:p="http://schemas.openxmlformats.org/presentationml/2006/main" xmlns:r="http://schemas.openxmlformats.org/officeDocument/2006/relationships">
+  <p:cSld>
+    <p:spTree>
+      <p:nvGrpSpPr>
+        <p:cNvPr id="1" name=""/>
+        <p:cNvGrpSpPr/>
+        <p:nvPr/>
+      </p:nvGrpSpPr>
+      <p:grpSpPr/>
+      <p:sp>
+        <p:nvSpPr>
+          <p:cNvPr id="2" name="!!BG"/>
+          <p:cNvSpPr/>
+          <p:nvPr/>
+        </p:nvSpPr>
+        <p:spPr>
+          <a:xfrm>
+            <a:off x="0" y="0"/>
+            <a:ext cx="12191695" cy="6858000"/>
+          </a:xfrm>
+          <a:prstGeom prst="rect">
+            <a:avLst/>
+          </a:prstGeom>
+          <a:solidFill>
+            <a:srgbClr val="201A13"/>
+          </a:solidFill>
+          <a:ln>
+            <a:noFill/>
+          </a:ln>
+        </p:spPr>
+        <p:style>
+          <a:lnRef idx="1">
+            <a:schemeClr val="accent1"/>
+          </a:lnRef>
+          <a:fillRef idx="3">
+            <a:schemeClr val="accent1"/>
+          </a:fillRef>
+          <a:effectRef idx="2">
+            <a:schemeClr val="accent1"/>
+          </a:effectRef>
+          <a:fontRef idx="minor">
+            <a:schemeClr val="lt1"/>
+          </a:fontRef>
+        </p:style>
+        <p:txBody>
+          <a:bodyPr rtlCol="0" anchor="ctr"/>
+          <a:lstStyle/>
+          <a:p>
+            <a:pPr algn="ctr"/>
+          </a:p>
+        </p:txBody>
+      </p:sp>
+      <p:sp>
+        <p:nvSpPr>
+          <p:cNvPr id="3" name="!!EYE"/>
+          <p:cNvSpPr txBox="1"/>
+          <p:nvPr/>
+        </p:nvSpPr>
+        <p:spPr>
+          <a:xfrm>
+            <a:off x="640080" y="292608"/>
+            <a:ext cx="9509760" cy="329184"/>
+          </a:xfrm>
+          <a:prstGeom prst="rect">
+            <a:avLst/>
+          </a:prstGeom>
+          <a:noFill/>
+        </p:spPr>
+        <p:txBody>
+          <a:bodyPr wrap="square" anchor="t">
+            <a:spAutoFit/>
+          </a:bodyPr>
+          <a:lstStyle/>
+          <a:p>
+            <a:pPr algn="l">
+              <a:spcAft>
+                <a:spcPts val="200"/>
+              </a:spcAft>
+            </a:pPr>
+            <a:r>
+              <a:rPr sz="1300" b="1" i="0">
+                <a:solidFill>
+                  <a:srgbClr val="C9A959"/>
+                </a:solidFill>
+                <a:latin typeface="Calibri"/>
+              </a:rPr>
+              <a:t>ANNEXE A2  ·  SECOURS JURY</a:t>
+            </a:r>
+          </a:p>
+        </p:txBody>
+      </p:sp>
+      <p:sp>
+        <p:nvSpPr>
+          <p:cNvPr id="4" name="!!TITLE"/>
+          <p:cNvSpPr txBox="1"/>
+          <p:nvPr/>
+        </p:nvSpPr>
+        <p:spPr>
+          <a:xfrm>
+            <a:off x="640080" y="658368"/>
+            <a:ext cx="9509760" cy="822960"/>
+          </a:xfrm>
+          <a:prstGeom prst="rect">
+            <a:avLst/>
+          </a:prstGeom>
+          <a:noFill/>
+        </p:spPr>
+        <p:txBody>
+          <a:bodyPr wrap="square" anchor="t">
+            <a:spAutoFit/>
+          </a:bodyPr>
+          <a:lstStyle/>
+          <a:p>
+            <a:pPr algn="l">
+              <a:spcAft>
+                <a:spcPts val="200"/>
+              </a:spcAft>
+            </a:pPr>
+            <a:r>
+              <a:rPr sz="3000" b="1" i="0">
+                <a:solidFill>
+                  <a:srgbClr val="F3ECDD"/>
+                </a:solidFill>
+                <a:latin typeface="Georgia"/>
+              </a:rPr>
+              <a:t>Sécurité — hachage, sessions, rôles</a:t>
+            </a:r>
+          </a:p>
+        </p:txBody>
+      </p:sp>
+      <p:sp>
+        <p:nvSpPr>
+          <p:cNvPr id="5" name="!!RULE"/>
+          <p:cNvSpPr/>
+          <p:nvPr/>
+        </p:nvSpPr>
+        <p:spPr>
+          <a:xfrm>
+            <a:off x="640080" y="1481328"/>
+            <a:ext cx="1463040" cy="38100"/>
+          </a:xfrm>
+          <a:prstGeom prst="rect">
+            <a:avLst/>
+          </a:prstGeom>
+          <a:solidFill>
+            <a:srgbClr val="C9A959"/>
+          </a:solidFill>
+          <a:ln>
+            <a:noFill/>
+          </a:ln>
+        </p:spPr>
+        <p:style>
+          <a:lnRef idx="1">
+            <a:schemeClr val="accent1"/>
+          </a:lnRef>
+          <a:fillRef idx="3">
+            <a:schemeClr val="accent1"/>
+          </a:fillRef>
+          <a:effectRef idx="2">
+            <a:schemeClr val="accent1"/>
+          </a:effectRef>
+          <a:fontRef idx="minor">
+            <a:schemeClr val="lt1"/>
+          </a:fontRef>
+        </p:style>
+        <p:txBody>
+          <a:bodyPr rtlCol="0" anchor="ctr"/>
+          <a:lstStyle/>
+          <a:p>
+            <a:pPr algn="ctr"/>
+          </a:p>
+        </p:txBody>
+      </p:sp>
+      <p:sp>
+        <p:nvSpPr>
+          <p:cNvPr id="6" name="!!GHOST"/>
+          <p:cNvSpPr txBox="1"/>
+          <p:nvPr/>
+        </p:nvSpPr>
+        <p:spPr>
+          <a:xfrm>
+            <a:off x="10287000" y="256032"/>
+            <a:ext cx="1325880" cy="1188720"/>
+          </a:xfrm>
+          <a:prstGeom prst="rect">
+            <a:avLst/>
+          </a:prstGeom>
+          <a:noFill/>
+        </p:spPr>
+        <p:txBody>
+          <a:bodyPr wrap="square" anchor="t">
+            <a:spAutoFit/>
+          </a:bodyPr>
+          <a:lstStyle/>
+          <a:p>
+            <a:pPr algn="r">
+              <a:spcAft>
+                <a:spcPts val="0"/>
+              </a:spcAft>
+            </a:pPr>
+            <a:r>
+              <a:rPr sz="5200" b="1" i="0">
+                <a:solidFill>
+                  <a:srgbClr val="5A4C24"/>
+                </a:solidFill>
+                <a:latin typeface="Georgia"/>
+              </a:rPr>
+              <a:t>A2</a:t>
+            </a:r>
+          </a:p>
+        </p:txBody>
+      </p:sp>
+      <p:pic>
+        <p:nvPicPr>
+          <p:cNvPr id="7" name="BK2A" descr="fig23_scrypt.png"/>
+          <p:cNvPicPr>
+            <a:picLocks noChangeAspect="1"/>
+          </p:cNvPicPr>
+          <p:nvPr/>
+        </p:nvPicPr>
+        <p:blipFill>
+          <a:blip r:embed="rId2"/>
+          <a:stretch>
+            <a:fillRect/>
+          </a:stretch>
+        </p:blipFill>
+        <p:spPr>
+          <a:xfrm>
+            <a:off x="640080" y="2657994"/>
+            <a:ext cx="5349240" cy="2593570"/>
+          </a:xfrm>
+          <a:ln w="15875">
+            <a:solidFill>
+              <a:srgbClr val="9A7B3F"/>
+            </a:solidFill>
+          </a:ln>
+          <a:prstGeom prst="roundRect">
+            <a:avLst>
+              <a:gd name="adj" fmla="val 9000"/>
+            </a:avLst>
+          </a:prstGeom>
+        </p:spPr>
+      </p:pic>
+      <p:pic>
+        <p:nvPicPr>
+          <p:cNvPr id="8" name="BK2B" descr="fig24_roles.png"/>
+          <p:cNvPicPr>
+            <a:picLocks noChangeAspect="1"/>
+          </p:cNvPicPr>
+          <p:nvPr/>
+        </p:nvPicPr>
+        <p:blipFill>
+          <a:blip r:embed="rId3"/>
+          <a:stretch>
+            <a:fillRect/>
+          </a:stretch>
+        </p:blipFill>
+        <p:spPr>
+          <a:xfrm>
+            <a:off x="6199632" y="2495896"/>
+            <a:ext cx="5349240" cy="2917767"/>
+          </a:xfrm>
+          <a:ln w="15875">
+            <a:solidFill>
+              <a:srgbClr val="9A7B3F"/>
+            </a:solidFill>
+          </a:ln>
+          <a:prstGeom prst="roundRect">
+            <a:avLst>
+              <a:gd name="adj" fmla="val 9000"/>
+            </a:avLst>
+          </a:prstGeom>
+        </p:spPr>
+      </p:pic>
+      <p:sp>
+        <p:nvSpPr>
+          <p:cNvPr id="9" name="!!FOOT"/>
+          <p:cNvSpPr txBox="1"/>
+          <p:nvPr/>
+        </p:nvSpPr>
+        <p:spPr>
+          <a:xfrm>
+            <a:off x="640080" y="6419088"/>
+            <a:ext cx="5486400" cy="320040"/>
+          </a:xfrm>
+          <a:prstGeom prst="rect">
+            <a:avLst/>
+          </a:prstGeom>
+          <a:noFill/>
+        </p:spPr>
+        <p:txBody>
+          <a:bodyPr wrap="square" anchor="t">
+            <a:spAutoFit/>
+          </a:bodyPr>
+          <a:lstStyle/>
+          <a:p>
+            <a:pPr algn="l">
+              <a:spcAft>
+                <a:spcPts val="600"/>
+              </a:spcAft>
+            </a:pPr>
+            <a:r>
+              <a:rPr sz="1100" b="0" i="0">
+                <a:solidFill>
+                  <a:srgbClr val="B9AC93"/>
+                </a:solidFill>
+                <a:latin typeface="Calibri"/>
+              </a:rPr>
+              <a:t>Cléopâtre · Soutenance PFE — Annexe jury</a:t>
+            </a:r>
+          </a:p>
+        </p:txBody>
+      </p:sp>
+      <p:sp>
+        <p:nvSpPr>
+          <p:cNvPr id="10" name="!!NUM"/>
+          <p:cNvSpPr txBox="1"/>
+          <p:nvPr/>
+        </p:nvSpPr>
+        <p:spPr>
+          <a:xfrm>
+            <a:off x="10972800" y="6419088"/>
+            <a:ext cx="640080" cy="320040"/>
+          </a:xfrm>
+          <a:prstGeom prst="rect">
+            <a:avLst/>
+          </a:prstGeom>
+          <a:noFill/>
+        </p:spPr>
+        <p:txBody>
+          <a:bodyPr wrap="square" anchor="t">
+            <a:spAutoFit/>
+          </a:bodyPr>
+          <a:lstStyle/>
+          <a:p>
+            <a:pPr algn="r">
+              <a:spcAft>
+                <a:spcPts val="600"/>
+              </a:spcAft>
+            </a:pPr>
+            <a:r>
+              <a:rPr sz="1100" b="0" i="0">
+                <a:solidFill>
+                  <a:srgbClr val="B9AC93"/>
+                </a:solidFill>
+                <a:latin typeface="Calibri"/>
+              </a:rPr>
+              <a:t>A2</a:t>
+            </a:r>
+          </a:p>
+        </p:txBody>
+      </p:sp>
+    </p:spTree>
+  </p:cSld>
+  <p:clrMapOvr>
+    <a:masterClrMapping/>
+  </p:clrMapOvr>
+  <mc:AlternateContent xmlns:mc="http://schemas.openxmlformats.org/markup-compatibility/2006" xmlns:p14="http://schemas.microsoft.com/office/powerpoint/2010/main" xmlns:p159="http://schemas.microsoft.com/office/powerpoint/2015/09/main">
+    <mc:Choice Requires="p159">
+      <p:transition spd="med" advOnClk="1" p14:dur="900">
+        <p159:morph option="byObject"/>
+      </p:transition>
+    </mc:Choice>
+    <mc:Fallback>
+      <p:transition spd="med">
+        <p:fade thruBlk="1"/>
+      </p:transition>
+    </mc:Fallback>
+  </mc:AlternateContent>
+</p:sld>
+</file>
+
+<file path=ppt/slides/slide22.xml><?xml version="1.0" encoding="utf-8"?>
+<p:sld xmlns:a="http://schemas.openxmlformats.org/drawingml/2006/main" xmlns:p="http://schemas.openxmlformats.org/presentationml/2006/main" xmlns:r="http://schemas.openxmlformats.org/officeDocument/2006/relationships">
+  <p:cSld>
+    <p:spTree>
+      <p:nvGrpSpPr>
+        <p:cNvPr id="1" name=""/>
+        <p:cNvGrpSpPr/>
+        <p:nvPr/>
+      </p:nvGrpSpPr>
+      <p:grpSpPr/>
+      <p:sp>
+        <p:nvSpPr>
+          <p:cNvPr id="2" name="!!BG"/>
+          <p:cNvSpPr/>
+          <p:nvPr/>
+        </p:nvSpPr>
+        <p:spPr>
+          <a:xfrm>
+            <a:off x="0" y="0"/>
+            <a:ext cx="12191695" cy="6858000"/>
+          </a:xfrm>
+          <a:prstGeom prst="rect">
+            <a:avLst/>
+          </a:prstGeom>
+          <a:solidFill>
+            <a:srgbClr val="201A13"/>
+          </a:solidFill>
+          <a:ln>
+            <a:noFill/>
+          </a:ln>
+        </p:spPr>
+        <p:style>
+          <a:lnRef idx="1">
+            <a:schemeClr val="accent1"/>
+          </a:lnRef>
+          <a:fillRef idx="3">
+            <a:schemeClr val="accent1"/>
+          </a:fillRef>
+          <a:effectRef idx="2">
+            <a:schemeClr val="accent1"/>
+          </a:effectRef>
+          <a:fontRef idx="minor">
+            <a:schemeClr val="lt1"/>
+          </a:fontRef>
+        </p:style>
+        <p:txBody>
+          <a:bodyPr rtlCol="0" anchor="ctr"/>
+          <a:lstStyle/>
+          <a:p>
+            <a:pPr algn="ctr"/>
+          </a:p>
+        </p:txBody>
+      </p:sp>
+      <p:sp>
+        <p:nvSpPr>
+          <p:cNvPr id="3" name="!!EYE"/>
+          <p:cNvSpPr txBox="1"/>
+          <p:nvPr/>
+        </p:nvSpPr>
+        <p:spPr>
+          <a:xfrm>
+            <a:off x="640080" y="292608"/>
+            <a:ext cx="9509760" cy="329184"/>
+          </a:xfrm>
+          <a:prstGeom prst="rect">
+            <a:avLst/>
+          </a:prstGeom>
+          <a:noFill/>
+        </p:spPr>
+        <p:txBody>
+          <a:bodyPr wrap="square" anchor="t">
+            <a:spAutoFit/>
+          </a:bodyPr>
+          <a:lstStyle/>
+          <a:p>
+            <a:pPr algn="l">
+              <a:spcAft>
+                <a:spcPts val="200"/>
+              </a:spcAft>
+            </a:pPr>
+            <a:r>
+              <a:rPr sz="1300" b="1" i="0">
+                <a:solidFill>
+                  <a:srgbClr val="C9A959"/>
+                </a:solidFill>
+                <a:latin typeface="Calibri"/>
+              </a:rPr>
+              <a:t>ANNEXE A3  ·  SECOURS JURY</a:t>
+            </a:r>
+          </a:p>
+        </p:txBody>
+      </p:sp>
+      <p:sp>
+        <p:nvSpPr>
+          <p:cNvPr id="4" name="!!TITLE"/>
+          <p:cNvSpPr txBox="1"/>
+          <p:nvPr/>
+        </p:nvSpPr>
+        <p:spPr>
+          <a:xfrm>
+            <a:off x="640080" y="658368"/>
+            <a:ext cx="9509760" cy="822960"/>
+          </a:xfrm>
+          <a:prstGeom prst="rect">
+            <a:avLst/>
+          </a:prstGeom>
+          <a:noFill/>
+        </p:spPr>
+        <p:txBody>
+          <a:bodyPr wrap="square" anchor="t">
+            <a:spAutoFit/>
+          </a:bodyPr>
+          <a:lstStyle/>
+          <a:p>
+            <a:pPr algn="l">
+              <a:spcAft>
+                <a:spcPts val="200"/>
+              </a:spcAft>
+            </a:pPr>
+            <a:r>
+              <a:rPr sz="3000" b="1" i="0">
+                <a:solidFill>
+                  <a:srgbClr val="F3ECDD"/>
+                </a:solidFill>
+                <a:latin typeface="Georgia"/>
+              </a:rPr>
+              <a:t>Modèle global — relation client, contenu, pilotage</a:t>
+            </a:r>
+          </a:p>
+        </p:txBody>
+      </p:sp>
+      <p:sp>
+        <p:nvSpPr>
+          <p:cNvPr id="5" name="!!RULE"/>
+          <p:cNvSpPr/>
+          <p:nvPr/>
+        </p:nvSpPr>
+        <p:spPr>
+          <a:xfrm>
+            <a:off x="640080" y="1481328"/>
+            <a:ext cx="1463040" cy="38100"/>
+          </a:xfrm>
+          <a:prstGeom prst="rect">
+            <a:avLst/>
+          </a:prstGeom>
+          <a:solidFill>
+            <a:srgbClr val="C9A959"/>
+          </a:solidFill>
+          <a:ln>
+            <a:noFill/>
+          </a:ln>
+        </p:spPr>
+        <p:style>
+          <a:lnRef idx="1">
+            <a:schemeClr val="accent1"/>
+          </a:lnRef>
+          <a:fillRef idx="3">
+            <a:schemeClr val="accent1"/>
+          </a:fillRef>
+          <a:effectRef idx="2">
+            <a:schemeClr val="accent1"/>
+          </a:effectRef>
+          <a:fontRef idx="minor">
+            <a:schemeClr val="lt1"/>
+          </a:fontRef>
+        </p:style>
+        <p:txBody>
+          <a:bodyPr rtlCol="0" anchor="ctr"/>
+          <a:lstStyle/>
+          <a:p>
+            <a:pPr algn="ctr"/>
+          </a:p>
+        </p:txBody>
+      </p:sp>
+      <p:sp>
+        <p:nvSpPr>
+          <p:cNvPr id="6" name="!!GHOST"/>
+          <p:cNvSpPr txBox="1"/>
+          <p:nvPr/>
+        </p:nvSpPr>
+        <p:spPr>
+          <a:xfrm>
+            <a:off x="10287000" y="256032"/>
+            <a:ext cx="1325880" cy="1188720"/>
+          </a:xfrm>
+          <a:prstGeom prst="rect">
+            <a:avLst/>
+          </a:prstGeom>
+          <a:noFill/>
+        </p:spPr>
+        <p:txBody>
+          <a:bodyPr wrap="square" anchor="t">
+            <a:spAutoFit/>
+          </a:bodyPr>
+          <a:lstStyle/>
+          <a:p>
+            <a:pPr algn="r">
+              <a:spcAft>
+                <a:spcPts val="0"/>
+              </a:spcAft>
+            </a:pPr>
+            <a:r>
+              <a:rPr sz="5200" b="1" i="0">
+                <a:solidFill>
+                  <a:srgbClr val="5A4C24"/>
+                </a:solidFill>
+                <a:latin typeface="Georgia"/>
+              </a:rPr>
+              <a:t>A3</a:t>
+            </a:r>
+          </a:p>
+        </p:txBody>
+      </p:sp>
+      <p:pic>
+        <p:nvPicPr>
+          <p:cNvPr id="7" name="BK3" descr="figGX_modele.png"/>
+          <p:cNvPicPr>
+            <a:picLocks noChangeAspect="1"/>
+          </p:cNvPicPr>
+          <p:nvPr/>
+        </p:nvPicPr>
+        <p:blipFill>
+          <a:blip r:embed="rId2"/>
+          <a:stretch>
+            <a:fillRect/>
+          </a:stretch>
+        </p:blipFill>
+        <p:spPr>
+          <a:xfrm>
+            <a:off x="4168821" y="1737360"/>
+            <a:ext cx="3851308" cy="4434840"/>
+          </a:xfrm>
+          <a:ln w="15875">
+            <a:solidFill>
+              <a:srgbClr val="9A7B3F"/>
+            </a:solidFill>
+          </a:ln>
+          <a:prstGeom prst="roundRect">
+            <a:avLst>
+              <a:gd name="adj" fmla="val 9000"/>
+            </a:avLst>
+          </a:prstGeom>
+        </p:spPr>
+      </p:pic>
+      <p:sp>
+        <p:nvSpPr>
+          <p:cNvPr id="8" name="!!FOOT"/>
+          <p:cNvSpPr txBox="1"/>
+          <p:nvPr/>
+        </p:nvSpPr>
+        <p:spPr>
+          <a:xfrm>
+            <a:off x="640080" y="6419088"/>
+            <a:ext cx="5486400" cy="320040"/>
+          </a:xfrm>
+          <a:prstGeom prst="rect">
+            <a:avLst/>
+          </a:prstGeom>
+          <a:noFill/>
+        </p:spPr>
+        <p:txBody>
+          <a:bodyPr wrap="square" anchor="t">
+            <a:spAutoFit/>
+          </a:bodyPr>
+          <a:lstStyle/>
+          <a:p>
+            <a:pPr algn="l">
+              <a:spcAft>
+                <a:spcPts val="600"/>
+              </a:spcAft>
+            </a:pPr>
+            <a:r>
+              <a:rPr sz="1100" b="0" i="0">
+                <a:solidFill>
+                  <a:srgbClr val="B9AC93"/>
+                </a:solidFill>
+                <a:latin typeface="Calibri"/>
+              </a:rPr>
+              <a:t>Cléopâtre · Soutenance PFE — Annexe jury</a:t>
+            </a:r>
+          </a:p>
+        </p:txBody>
+      </p:sp>
+      <p:sp>
+        <p:nvSpPr>
+          <p:cNvPr id="9" name="!!NUM"/>
+          <p:cNvSpPr txBox="1"/>
+          <p:nvPr/>
+        </p:nvSpPr>
+        <p:spPr>
+          <a:xfrm>
+            <a:off x="10972800" y="6419088"/>
+            <a:ext cx="640080" cy="320040"/>
+          </a:xfrm>
+          <a:prstGeom prst="rect">
+            <a:avLst/>
+          </a:prstGeom>
+          <a:noFill/>
+        </p:spPr>
+        <p:txBody>
+          <a:bodyPr wrap="square" anchor="t">
+            <a:spAutoFit/>
+          </a:bodyPr>
+          <a:lstStyle/>
+          <a:p>
+            <a:pPr algn="r">
+              <a:spcAft>
+                <a:spcPts val="600"/>
+              </a:spcAft>
+            </a:pPr>
+            <a:r>
+              <a:rPr sz="1100" b="0" i="0">
+                <a:solidFill>
+                  <a:srgbClr val="B9AC93"/>
+                </a:solidFill>
+                <a:latin typeface="Calibri"/>
+              </a:rPr>
+              <a:t>A3</a:t>
+            </a:r>
+          </a:p>
+        </p:txBody>
+      </p:sp>
+    </p:spTree>
+  </p:cSld>
+  <p:clrMapOvr>
+    <a:masterClrMapping/>
+  </p:clrMapOvr>
+  <mc:AlternateContent xmlns:mc="http://schemas.openxmlformats.org/markup-compatibility/2006" xmlns:p14="http://schemas.microsoft.com/office/powerpoint/2010/main" xmlns:p159="http://schemas.microsoft.com/office/powerpoint/2015/09/main">
+    <mc:Choice Requires="p159">
+      <p:transition spd="med" advOnClk="1" p14:dur="900">
+        <p159:morph option="byObject"/>
+      </p:transition>
+    </mc:Choice>
+    <mc:Fallback>
+      <p:transition spd="med">
+        <p:fade thruBlk="1"/>
+      </p:transition>
+    </mc:Fallback>
+  </mc:AlternateContent>
+</p:sld>
+</file>
+
+<file path=ppt/slides/slide23.xml><?xml version="1.0" encoding="utf-8"?>
+<p:sld xmlns:a="http://schemas.openxmlformats.org/drawingml/2006/main" xmlns:p="http://schemas.openxmlformats.org/presentationml/2006/main" xmlns:r="http://schemas.openxmlformats.org/officeDocument/2006/relationships">
+  <p:cSld>
+    <p:spTree>
+      <p:nvGrpSpPr>
+        <p:cNvPr id="1" name=""/>
+        <p:cNvGrpSpPr/>
+        <p:nvPr/>
+      </p:nvGrpSpPr>
+      <p:grpSpPr/>
+      <p:sp>
+        <p:nvSpPr>
+          <p:cNvPr id="2" name="!!BG"/>
+          <p:cNvSpPr/>
+          <p:nvPr/>
+        </p:nvSpPr>
+        <p:spPr>
+          <a:xfrm>
+            <a:off x="0" y="0"/>
+            <a:ext cx="12191695" cy="6858000"/>
+          </a:xfrm>
+          <a:prstGeom prst="rect">
+            <a:avLst/>
+          </a:prstGeom>
+          <a:solidFill>
+            <a:srgbClr val="201A13"/>
+          </a:solidFill>
+          <a:ln>
+            <a:noFill/>
+          </a:ln>
+        </p:spPr>
+        <p:style>
+          <a:lnRef idx="1">
+            <a:schemeClr val="accent1"/>
+          </a:lnRef>
+          <a:fillRef idx="3">
+            <a:schemeClr val="accent1"/>
+          </a:fillRef>
+          <a:effectRef idx="2">
+            <a:schemeClr val="accent1"/>
+          </a:effectRef>
+          <a:fontRef idx="minor">
+            <a:schemeClr val="lt1"/>
+          </a:fontRef>
+        </p:style>
+        <p:txBody>
+          <a:bodyPr rtlCol="0" anchor="ctr"/>
+          <a:lstStyle/>
+          <a:p>
+            <a:pPr algn="ctr"/>
+          </a:p>
+        </p:txBody>
+      </p:sp>
+      <p:sp>
+        <p:nvSpPr>
+          <p:cNvPr id="3" name="!!EYE"/>
+          <p:cNvSpPr txBox="1"/>
+          <p:nvPr/>
+        </p:nvSpPr>
+        <p:spPr>
+          <a:xfrm>
+            <a:off x="640080" y="292608"/>
+            <a:ext cx="9509760" cy="329184"/>
+          </a:xfrm>
+          <a:prstGeom prst="rect">
+            <a:avLst/>
+          </a:prstGeom>
+          <a:noFill/>
+        </p:spPr>
+        <p:txBody>
+          <a:bodyPr wrap="square" anchor="t">
+            <a:spAutoFit/>
+          </a:bodyPr>
+          <a:lstStyle/>
+          <a:p>
+            <a:pPr algn="l">
+              <a:spcAft>
+                <a:spcPts val="200"/>
+              </a:spcAft>
+            </a:pPr>
+            <a:r>
+              <a:rPr sz="1300" b="1" i="0">
+                <a:solidFill>
+                  <a:srgbClr val="C9A959"/>
+                </a:solidFill>
+                <a:latin typeface="Calibri"/>
+              </a:rPr>
+              <a:t>ANNEXE A4  ·  SECOURS JURY</a:t>
+            </a:r>
+          </a:p>
+        </p:txBody>
+      </p:sp>
+      <p:sp>
+        <p:nvSpPr>
+          <p:cNvPr id="4" name="!!TITLE"/>
+          <p:cNvSpPr txBox="1"/>
+          <p:nvPr/>
+        </p:nvSpPr>
+        <p:spPr>
+          <a:xfrm>
+            <a:off x="640080" y="658368"/>
+            <a:ext cx="9509760" cy="822960"/>
+          </a:xfrm>
+          <a:prstGeom prst="rect">
+            <a:avLst/>
+          </a:prstGeom>
+          <a:noFill/>
+        </p:spPr>
+        <p:txBody>
+          <a:bodyPr wrap="square" anchor="t">
+            <a:spAutoFit/>
+          </a:bodyPr>
+          <a:lstStyle/>
+          <a:p>
+            <a:pPr algn="l">
+              <a:spcAft>
+                <a:spcPts val="200"/>
+              </a:spcAft>
+            </a:pPr>
+            <a:r>
+              <a:rPr sz="3000" b="1" i="0">
+                <a:solidFill>
+                  <a:srgbClr val="F3ECDD"/>
+                </a:solidFill>
+                <a:latin typeface="Georgia"/>
+              </a:rPr>
+              <a:t>Mise en production — conteneurs et recette</a:t>
+            </a:r>
+          </a:p>
+        </p:txBody>
+      </p:sp>
+      <p:sp>
+        <p:nvSpPr>
+          <p:cNvPr id="5" name="!!RULE"/>
+          <p:cNvSpPr/>
+          <p:nvPr/>
+        </p:nvSpPr>
+        <p:spPr>
+          <a:xfrm>
+            <a:off x="640080" y="1481328"/>
+            <a:ext cx="1463040" cy="38100"/>
+          </a:xfrm>
+          <a:prstGeom prst="rect">
+            <a:avLst/>
+          </a:prstGeom>
+          <a:solidFill>
+            <a:srgbClr val="C9A959"/>
+          </a:solidFill>
+          <a:ln>
+            <a:noFill/>
+          </a:ln>
+        </p:spPr>
+        <p:style>
+          <a:lnRef idx="1">
+            <a:schemeClr val="accent1"/>
+          </a:lnRef>
+          <a:fillRef idx="3">
+            <a:schemeClr val="accent1"/>
+          </a:fillRef>
+          <a:effectRef idx="2">
+            <a:schemeClr val="accent1"/>
+          </a:effectRef>
+          <a:fontRef idx="minor">
+            <a:schemeClr val="lt1"/>
+          </a:fontRef>
+        </p:style>
+        <p:txBody>
+          <a:bodyPr rtlCol="0" anchor="ctr"/>
+          <a:lstStyle/>
+          <a:p>
+            <a:pPr algn="ctr"/>
+          </a:p>
+        </p:txBody>
+      </p:sp>
+      <p:sp>
+        <p:nvSpPr>
+          <p:cNvPr id="6" name="!!GHOST"/>
+          <p:cNvSpPr txBox="1"/>
+          <p:nvPr/>
+        </p:nvSpPr>
+        <p:spPr>
+          <a:xfrm>
+            <a:off x="10287000" y="256032"/>
+            <a:ext cx="1325880" cy="1188720"/>
+          </a:xfrm>
+          <a:prstGeom prst="rect">
+            <a:avLst/>
+          </a:prstGeom>
+          <a:noFill/>
+        </p:spPr>
+        <p:txBody>
+          <a:bodyPr wrap="square" anchor="t">
+            <a:spAutoFit/>
+          </a:bodyPr>
+          <a:lstStyle/>
+          <a:p>
+            <a:pPr algn="r">
+              <a:spcAft>
+                <a:spcPts val="0"/>
+              </a:spcAft>
+            </a:pPr>
+            <a:r>
+              <a:rPr sz="5200" b="1" i="0">
+                <a:solidFill>
+                  <a:srgbClr val="5A4C24"/>
+                </a:solidFill>
+                <a:latin typeface="Georgia"/>
+              </a:rPr>
+              <a:t>A4</a:t>
+            </a:r>
+          </a:p>
+        </p:txBody>
+      </p:sp>
+      <p:pic>
+        <p:nvPicPr>
+          <p:cNvPr id="7" name="BK4" descr="fig19_deploiement.png"/>
+          <p:cNvPicPr>
+            <a:picLocks noChangeAspect="1"/>
+          </p:cNvPicPr>
+          <p:nvPr/>
+        </p:nvPicPr>
+        <p:blipFill>
+          <a:blip r:embed="rId2"/>
+          <a:stretch>
+            <a:fillRect/>
+          </a:stretch>
+        </p:blipFill>
+        <p:spPr>
+          <a:xfrm>
+            <a:off x="2609958" y="1737360"/>
+            <a:ext cx="6969034" cy="4434840"/>
+          </a:xfrm>
+          <a:ln w="15875">
+            <a:solidFill>
+              <a:srgbClr val="9A7B3F"/>
+            </a:solidFill>
+          </a:ln>
+          <a:prstGeom prst="roundRect">
+            <a:avLst>
+              <a:gd name="adj" fmla="val 9000"/>
+            </a:avLst>
+          </a:prstGeom>
+        </p:spPr>
+      </p:pic>
+      <p:sp>
+        <p:nvSpPr>
+          <p:cNvPr id="8" name="!!FOOT"/>
+          <p:cNvSpPr txBox="1"/>
+          <p:nvPr/>
+        </p:nvSpPr>
+        <p:spPr>
+          <a:xfrm>
+            <a:off x="640080" y="6419088"/>
+            <a:ext cx="5486400" cy="320040"/>
+          </a:xfrm>
+          <a:prstGeom prst="rect">
+            <a:avLst/>
+          </a:prstGeom>
+          <a:noFill/>
+        </p:spPr>
+        <p:txBody>
+          <a:bodyPr wrap="square" anchor="t">
+            <a:spAutoFit/>
+          </a:bodyPr>
+          <a:lstStyle/>
+          <a:p>
+            <a:pPr algn="l">
+              <a:spcAft>
+                <a:spcPts val="600"/>
+              </a:spcAft>
+            </a:pPr>
+            <a:r>
+              <a:rPr sz="1100" b="0" i="0">
+                <a:solidFill>
+                  <a:srgbClr val="B9AC93"/>
+                </a:solidFill>
+                <a:latin typeface="Calibri"/>
+              </a:rPr>
+              <a:t>Cléopâtre · Soutenance PFE — Annexe jury</a:t>
+            </a:r>
+          </a:p>
+        </p:txBody>
+      </p:sp>
+      <p:sp>
+        <p:nvSpPr>
+          <p:cNvPr id="9" name="!!NUM"/>
+          <p:cNvSpPr txBox="1"/>
+          <p:nvPr/>
+        </p:nvSpPr>
+        <p:spPr>
+          <a:xfrm>
+            <a:off x="10972800" y="6419088"/>
+            <a:ext cx="640080" cy="320040"/>
+          </a:xfrm>
+          <a:prstGeom prst="rect">
+            <a:avLst/>
+          </a:prstGeom>
+          <a:noFill/>
+        </p:spPr>
+        <p:txBody>
+          <a:bodyPr wrap="square" anchor="t">
+            <a:spAutoFit/>
+          </a:bodyPr>
+          <a:lstStyle/>
+          <a:p>
+            <a:pPr algn="r">
+              <a:spcAft>
+                <a:spcPts val="600"/>
+              </a:spcAft>
+            </a:pPr>
+            <a:r>
+              <a:rPr sz="1100" b="0" i="0">
+                <a:solidFill>
+                  <a:srgbClr val="B9AC93"/>
+                </a:solidFill>
+                <a:latin typeface="Calibri"/>
+              </a:rPr>
+              <a:t>A4</a:t>
             </a:r>
           </a:p>
         </p:txBody>
@@ -10533,7 +13372,7 @@
         <p:spPr>
           <a:xfrm>
             <a:off x="640080" y="292608"/>
-            <a:ext cx="10881360" cy="329184"/>
+            <a:ext cx="9509760" cy="329184"/>
           </a:xfrm>
           <a:prstGeom prst="rect">
             <a:avLst/>
@@ -10572,7 +13411,7 @@
         <p:spPr>
           <a:xfrm>
             <a:off x="640080" y="658368"/>
-            <a:ext cx="10881360" cy="822960"/>
+            <a:ext cx="9509760" cy="822960"/>
           </a:xfrm>
           <a:prstGeom prst="rect">
             <a:avLst/>
@@ -10645,9 +13484,48 @@
           </a:p>
         </p:txBody>
       </p:sp>
+      <p:sp>
+        <p:nvSpPr>
+          <p:cNvPr id="6" name="!!GHOST"/>
+          <p:cNvSpPr txBox="1"/>
+          <p:nvPr/>
+        </p:nvSpPr>
+        <p:spPr>
+          <a:xfrm>
+            <a:off x="10287000" y="256032"/>
+            <a:ext cx="1325880" cy="1188720"/>
+          </a:xfrm>
+          <a:prstGeom prst="rect">
+            <a:avLst/>
+          </a:prstGeom>
+          <a:noFill/>
+        </p:spPr>
+        <p:txBody>
+          <a:bodyPr wrap="square" anchor="t">
+            <a:spAutoFit/>
+          </a:bodyPr>
+          <a:lstStyle/>
+          <a:p>
+            <a:pPr algn="r">
+              <a:spcAft>
+                <a:spcPts val="0"/>
+              </a:spcAft>
+            </a:pPr>
+            <a:r>
+              <a:rPr sz="5200" b="1" i="0">
+                <a:solidFill>
+                  <a:srgbClr val="5A4C24"/>
+                </a:solidFill>
+                <a:latin typeface="Georgia"/>
+              </a:rPr>
+              <a:t>01</a:t>
+            </a:r>
+          </a:p>
+        </p:txBody>
+      </p:sp>
       <p:pic>
         <p:nvPicPr>
-          <p:cNvPr id="6" name="!!LOGO" descr="fig01_logo.png"/>
+          <p:cNvPr id="7" name="!!LOGO" descr="fig01_logo.png"/>
           <p:cNvPicPr>
             <a:picLocks noChangeAspect="1"/>
           </p:cNvPicPr>
@@ -10664,14 +13542,16 @@
             <a:off x="640080" y="2156908"/>
             <a:ext cx="2011680" cy="1538343"/>
           </a:xfrm>
-          <a:prstGeom prst="rect">
-            <a:avLst/>
+          <a:prstGeom prst="roundRect">
+            <a:avLst>
+              <a:gd name="adj" fmla="val 9000"/>
+            </a:avLst>
           </a:prstGeom>
         </p:spPr>
       </p:pic>
       <p:sp>
         <p:nvSpPr>
-          <p:cNvPr id="7" name="CTX0"/>
+          <p:cNvPr id="8" name="CTX0"/>
           <p:cNvSpPr/>
           <p:nvPr/>
         </p:nvSpPr>
@@ -10718,7 +13598,7 @@
       </p:sp>
       <p:sp>
         <p:nvSpPr>
-          <p:cNvPr id="8" name="TextBox 7"/>
+          <p:cNvPr id="9" name="TextBox 8"/>
           <p:cNvSpPr txBox="1"/>
           <p:nvPr/>
         </p:nvSpPr>
@@ -10799,7 +13679,7 @@
       </p:sp>
       <p:sp>
         <p:nvSpPr>
-          <p:cNvPr id="9" name="CTX1"/>
+          <p:cNvPr id="10" name="CTX1"/>
           <p:cNvSpPr/>
           <p:nvPr/>
         </p:nvSpPr>
@@ -10846,7 +13726,7 @@
       </p:sp>
       <p:sp>
         <p:nvSpPr>
-          <p:cNvPr id="10" name="TextBox 9"/>
+          <p:cNvPr id="11" name="TextBox 10"/>
           <p:cNvSpPr txBox="1"/>
           <p:nvPr/>
         </p:nvSpPr>
@@ -10927,7 +13807,7 @@
       </p:sp>
       <p:sp>
         <p:nvSpPr>
-          <p:cNvPr id="11" name="CTX2"/>
+          <p:cNvPr id="12" name="CTX2"/>
           <p:cNvSpPr/>
           <p:nvPr/>
         </p:nvSpPr>
@@ -10974,7 +13854,7 @@
       </p:sp>
       <p:sp>
         <p:nvSpPr>
-          <p:cNvPr id="12" name="TextBox 11"/>
+          <p:cNvPr id="13" name="TextBox 12"/>
           <p:cNvSpPr txBox="1"/>
           <p:nvPr/>
         </p:nvSpPr>
@@ -11055,7 +13935,7 @@
       </p:sp>
       <p:sp>
         <p:nvSpPr>
-          <p:cNvPr id="13" name="TextBox 12"/>
+          <p:cNvPr id="14" name="TextBox 13"/>
           <p:cNvSpPr txBox="1"/>
           <p:nvPr/>
         </p:nvSpPr>
@@ -11104,7 +13984,7 @@
       </p:sp>
       <p:sp>
         <p:nvSpPr>
-          <p:cNvPr id="14" name="!!FOOT"/>
+          <p:cNvPr id="15" name="!!FOOT"/>
           <p:cNvSpPr txBox="1"/>
           <p:nvPr/>
         </p:nvSpPr>
@@ -11143,7 +14023,7 @@
       </p:sp>
       <p:sp>
         <p:nvSpPr>
-          <p:cNvPr id="15" name="!!NUM"/>
+          <p:cNvPr id="16" name="!!NUM"/>
           <p:cNvSpPr txBox="1"/>
           <p:nvPr/>
         </p:nvSpPr>
@@ -11262,7 +14142,7 @@
         <p:spPr>
           <a:xfrm>
             <a:off x="640080" y="292608"/>
-            <a:ext cx="10881360" cy="329184"/>
+            <a:ext cx="9509760" cy="329184"/>
           </a:xfrm>
           <a:prstGeom prst="rect">
             <a:avLst/>
@@ -11301,7 +14181,7 @@
         <p:spPr>
           <a:xfrm>
             <a:off x="640080" y="658368"/>
-            <a:ext cx="10881360" cy="822960"/>
+            <a:ext cx="9509760" cy="822960"/>
           </a:xfrm>
           <a:prstGeom prst="rect">
             <a:avLst/>
@@ -11376,7 +14256,46 @@
       </p:sp>
       <p:sp>
         <p:nvSpPr>
-          <p:cNvPr id="6" name="PB0"/>
+          <p:cNvPr id="6" name="!!GHOST"/>
+          <p:cNvSpPr txBox="1"/>
+          <p:nvPr/>
+        </p:nvSpPr>
+        <p:spPr>
+          <a:xfrm>
+            <a:off x="10287000" y="256032"/>
+            <a:ext cx="1325880" cy="1188720"/>
+          </a:xfrm>
+          <a:prstGeom prst="rect">
+            <a:avLst/>
+          </a:prstGeom>
+          <a:noFill/>
+        </p:spPr>
+        <p:txBody>
+          <a:bodyPr wrap="square" anchor="t">
+            <a:spAutoFit/>
+          </a:bodyPr>
+          <a:lstStyle/>
+          <a:p>
+            <a:pPr algn="r">
+              <a:spcAft>
+                <a:spcPts val="0"/>
+              </a:spcAft>
+            </a:pPr>
+            <a:r>
+              <a:rPr sz="5200" b="1" i="0">
+                <a:solidFill>
+                  <a:srgbClr val="5A4C24"/>
+                </a:solidFill>
+                <a:latin typeface="Georgia"/>
+              </a:rPr>
+              <a:t>01</a:t>
+            </a:r>
+          </a:p>
+        </p:txBody>
+      </p:sp>
+      <p:sp>
+        <p:nvSpPr>
+          <p:cNvPr id="7" name="PB0"/>
           <p:cNvSpPr/>
           <p:nvPr/>
         </p:nvSpPr>
@@ -11423,7 +14342,7 @@
       </p:sp>
       <p:sp>
         <p:nvSpPr>
-          <p:cNvPr id="7" name="TextBox 6"/>
+          <p:cNvPr id="8" name="TextBox 7"/>
           <p:cNvSpPr txBox="1"/>
           <p:nvPr/>
         </p:nvSpPr>
@@ -11488,7 +14407,7 @@
       </p:sp>
       <p:sp>
         <p:nvSpPr>
-          <p:cNvPr id="8" name="PB1"/>
+          <p:cNvPr id="9" name="PB1"/>
           <p:cNvSpPr/>
           <p:nvPr/>
         </p:nvSpPr>
@@ -11535,7 +14454,7 @@
       </p:sp>
       <p:sp>
         <p:nvSpPr>
-          <p:cNvPr id="9" name="TextBox 8"/>
+          <p:cNvPr id="10" name="TextBox 9"/>
           <p:cNvSpPr txBox="1"/>
           <p:nvPr/>
         </p:nvSpPr>
@@ -11600,7 +14519,7 @@
       </p:sp>
       <p:sp>
         <p:nvSpPr>
-          <p:cNvPr id="10" name="PB2"/>
+          <p:cNvPr id="11" name="PB2"/>
           <p:cNvSpPr/>
           <p:nvPr/>
         </p:nvSpPr>
@@ -11647,7 +14566,7 @@
       </p:sp>
       <p:sp>
         <p:nvSpPr>
-          <p:cNvPr id="11" name="TextBox 10"/>
+          <p:cNvPr id="12" name="TextBox 11"/>
           <p:cNvSpPr txBox="1"/>
           <p:nvPr/>
         </p:nvSpPr>
@@ -11712,7 +14631,7 @@
       </p:sp>
       <p:sp>
         <p:nvSpPr>
-          <p:cNvPr id="12" name="PB3"/>
+          <p:cNvPr id="13" name="PB3"/>
           <p:cNvSpPr/>
           <p:nvPr/>
         </p:nvSpPr>
@@ -11759,7 +14678,7 @@
       </p:sp>
       <p:sp>
         <p:nvSpPr>
-          <p:cNvPr id="13" name="TextBox 12"/>
+          <p:cNvPr id="14" name="TextBox 13"/>
           <p:cNvSpPr txBox="1"/>
           <p:nvPr/>
         </p:nvSpPr>
@@ -11824,7 +14743,7 @@
       </p:sp>
       <p:sp>
         <p:nvSpPr>
-          <p:cNvPr id="14" name="REFONTE"/>
+          <p:cNvPr id="15" name="REFONTE"/>
           <p:cNvSpPr/>
           <p:nvPr/>
         </p:nvSpPr>
@@ -11871,7 +14790,7 @@
       </p:sp>
       <p:sp>
         <p:nvSpPr>
-          <p:cNvPr id="15" name="TextBox 14"/>
+          <p:cNvPr id="16" name="TextBox 15"/>
           <p:cNvSpPr txBox="1"/>
           <p:nvPr/>
         </p:nvSpPr>
@@ -11926,7 +14845,7 @@
       </p:sp>
       <p:sp>
         <p:nvSpPr>
-          <p:cNvPr id="16" name="!!FOOT"/>
+          <p:cNvPr id="17" name="!!FOOT"/>
           <p:cNvSpPr txBox="1"/>
           <p:nvPr/>
         </p:nvSpPr>
@@ -11965,7 +14884,7 @@
       </p:sp>
       <p:sp>
         <p:nvSpPr>
-          <p:cNvPr id="17" name="!!NUM"/>
+          <p:cNvPr id="18" name="!!NUM"/>
           <p:cNvSpPr txBox="1"/>
           <p:nvPr/>
         </p:nvSpPr>
@@ -12084,7 +15003,7 @@
         <p:spPr>
           <a:xfrm>
             <a:off x="640080" y="292608"/>
-            <a:ext cx="10881360" cy="329184"/>
+            <a:ext cx="9509760" cy="329184"/>
           </a:xfrm>
           <a:prstGeom prst="rect">
             <a:avLst/>
@@ -12123,7 +15042,7 @@
         <p:spPr>
           <a:xfrm>
             <a:off x="640080" y="658368"/>
-            <a:ext cx="10881360" cy="822960"/>
+            <a:ext cx="9509760" cy="822960"/>
           </a:xfrm>
           <a:prstGeom prst="rect">
             <a:avLst/>
@@ -12198,7 +15117,46 @@
       </p:sp>
       <p:sp>
         <p:nvSpPr>
-          <p:cNvPr id="6" name="SOL0"/>
+          <p:cNvPr id="6" name="!!GHOST"/>
+          <p:cNvSpPr txBox="1"/>
+          <p:nvPr/>
+        </p:nvSpPr>
+        <p:spPr>
+          <a:xfrm>
+            <a:off x="10287000" y="256032"/>
+            <a:ext cx="1325880" cy="1188720"/>
+          </a:xfrm>
+          <a:prstGeom prst="rect">
+            <a:avLst/>
+          </a:prstGeom>
+          <a:noFill/>
+        </p:spPr>
+        <p:txBody>
+          <a:bodyPr wrap="square" anchor="t">
+            <a:spAutoFit/>
+          </a:bodyPr>
+          <a:lstStyle/>
+          <a:p>
+            <a:pPr algn="r">
+              <a:spcAft>
+                <a:spcPts val="0"/>
+              </a:spcAft>
+            </a:pPr>
+            <a:r>
+              <a:rPr sz="5200" b="1" i="0">
+                <a:solidFill>
+                  <a:srgbClr val="5A4C24"/>
+                </a:solidFill>
+                <a:latin typeface="Georgia"/>
+              </a:rPr>
+              <a:t>02</a:t>
+            </a:r>
+          </a:p>
+        </p:txBody>
+      </p:sp>
+      <p:sp>
+        <p:nvSpPr>
+          <p:cNvPr id="7" name="SOL0"/>
           <p:cNvSpPr/>
           <p:nvPr/>
         </p:nvSpPr>
@@ -12245,7 +15203,7 @@
       </p:sp>
       <p:sp>
         <p:nvSpPr>
-          <p:cNvPr id="7" name="TextBox 6"/>
+          <p:cNvPr id="8" name="TextBox 7"/>
           <p:cNvSpPr txBox="1"/>
           <p:nvPr/>
         </p:nvSpPr>
@@ -12330,7 +15288,7 @@
       </p:sp>
       <p:sp>
         <p:nvSpPr>
-          <p:cNvPr id="8" name="SOL1"/>
+          <p:cNvPr id="9" name="SOL1"/>
           <p:cNvSpPr/>
           <p:nvPr/>
         </p:nvSpPr>
@@ -12377,7 +15335,7 @@
       </p:sp>
       <p:sp>
         <p:nvSpPr>
-          <p:cNvPr id="9" name="TextBox 8"/>
+          <p:cNvPr id="10" name="TextBox 9"/>
           <p:cNvSpPr txBox="1"/>
           <p:nvPr/>
         </p:nvSpPr>
@@ -12462,7 +15420,7 @@
       </p:sp>
       <p:sp>
         <p:nvSpPr>
-          <p:cNvPr id="10" name="!!FOOT"/>
+          <p:cNvPr id="11" name="!!FOOT"/>
           <p:cNvSpPr txBox="1"/>
           <p:nvPr/>
         </p:nvSpPr>
@@ -12501,7 +15459,7 @@
       </p:sp>
       <p:sp>
         <p:nvSpPr>
-          <p:cNvPr id="11" name="!!NUM"/>
+          <p:cNvPr id="12" name="!!NUM"/>
           <p:cNvSpPr txBox="1"/>
           <p:nvPr/>
         </p:nvSpPr>
@@ -12620,7 +15578,7 @@
         <p:spPr>
           <a:xfrm>
             <a:off x="640080" y="292608"/>
-            <a:ext cx="10881360" cy="329184"/>
+            <a:ext cx="9509760" cy="329184"/>
           </a:xfrm>
           <a:prstGeom prst="rect">
             <a:avLst/>
@@ -12659,7 +15617,7 @@
         <p:spPr>
           <a:xfrm>
             <a:off x="640080" y="658368"/>
-            <a:ext cx="10881360" cy="822960"/>
+            <a:ext cx="9509760" cy="822960"/>
           </a:xfrm>
           <a:prstGeom prst="rect">
             <a:avLst/>
@@ -12732,9 +15690,48 @@
           </a:p>
         </p:txBody>
       </p:sp>
+      <p:sp>
+        <p:nvSpPr>
+          <p:cNvPr id="6" name="!!GHOST"/>
+          <p:cNvSpPr txBox="1"/>
+          <p:nvPr/>
+        </p:nvSpPr>
+        <p:spPr>
+          <a:xfrm>
+            <a:off x="10287000" y="256032"/>
+            <a:ext cx="1325880" cy="1188720"/>
+          </a:xfrm>
+          <a:prstGeom prst="rect">
+            <a:avLst/>
+          </a:prstGeom>
+          <a:noFill/>
+        </p:spPr>
+        <p:txBody>
+          <a:bodyPr wrap="square" anchor="t">
+            <a:spAutoFit/>
+          </a:bodyPr>
+          <a:lstStyle/>
+          <a:p>
+            <a:pPr algn="r">
+              <a:spcAft>
+                <a:spcPts val="0"/>
+              </a:spcAft>
+            </a:pPr>
+            <a:r>
+              <a:rPr sz="5200" b="1" i="0">
+                <a:solidFill>
+                  <a:srgbClr val="5A4C24"/>
+                </a:solidFill>
+                <a:latin typeface="Georgia"/>
+              </a:rPr>
+              <a:t>02</a:t>
+            </a:r>
+          </a:p>
+        </p:txBody>
+      </p:sp>
       <p:pic>
         <p:nvPicPr>
-          <p:cNvPr id="6" name="SCRUM" descr="fig03_scrum.png"/>
+          <p:cNvPr id="7" name="SCRUM" descr="fig03_scrum.png"/>
           <p:cNvPicPr>
             <a:picLocks noChangeAspect="1"/>
           </p:cNvPicPr>
@@ -12751,19 +15748,21 @@
             <a:off x="640080" y="2197330"/>
             <a:ext cx="5120640" cy="3103418"/>
           </a:xfrm>
-          <a:prstGeom prst="rect">
-            <a:avLst/>
-          </a:prstGeom>
           <a:ln w="15875">
             <a:solidFill>
               <a:srgbClr val="9A7B3F"/>
             </a:solidFill>
           </a:ln>
+          <a:prstGeom prst="roundRect">
+            <a:avLst>
+              <a:gd name="adj" fmla="val 9000"/>
+            </a:avLst>
+          </a:prstGeom>
         </p:spPr>
       </p:pic>
       <p:sp>
         <p:nvSpPr>
-          <p:cNvPr id="7" name="REL1"/>
+          <p:cNvPr id="8" name="REL1"/>
           <p:cNvSpPr/>
           <p:nvPr/>
         </p:nvSpPr>
@@ -12810,7 +15809,7 @@
       </p:sp>
       <p:sp>
         <p:nvSpPr>
-          <p:cNvPr id="8" name="TextBox 7"/>
+          <p:cNvPr id="9" name="TextBox 8"/>
           <p:cNvSpPr txBox="1"/>
           <p:nvPr/>
         </p:nvSpPr>
@@ -12891,7 +15890,7 @@
       </p:sp>
       <p:sp>
         <p:nvSpPr>
-          <p:cNvPr id="9" name="REL2"/>
+          <p:cNvPr id="10" name="REL2"/>
           <p:cNvSpPr/>
           <p:nvPr/>
         </p:nvSpPr>
@@ -12938,7 +15937,7 @@
       </p:sp>
       <p:sp>
         <p:nvSpPr>
-          <p:cNvPr id="10" name="TextBox 9"/>
+          <p:cNvPr id="11" name="TextBox 10"/>
           <p:cNvSpPr txBox="1"/>
           <p:nvPr/>
         </p:nvSpPr>
@@ -13019,7 +16018,7 @@
       </p:sp>
       <p:sp>
         <p:nvSpPr>
-          <p:cNvPr id="11" name="TextBox 10"/>
+          <p:cNvPr id="12" name="TextBox 11"/>
           <p:cNvSpPr txBox="1"/>
           <p:nvPr/>
         </p:nvSpPr>
@@ -13058,7 +16057,7 @@
       </p:sp>
       <p:sp>
         <p:nvSpPr>
-          <p:cNvPr id="12" name="!!FOOT"/>
+          <p:cNvPr id="13" name="!!FOOT"/>
           <p:cNvSpPr txBox="1"/>
           <p:nvPr/>
         </p:nvSpPr>
@@ -13097,7 +16096,7 @@
       </p:sp>
       <p:sp>
         <p:nvSpPr>
-          <p:cNvPr id="13" name="!!NUM"/>
+          <p:cNvPr id="14" name="!!NUM"/>
           <p:cNvSpPr txBox="1"/>
           <p:nvPr/>
         </p:nvSpPr>
@@ -13216,7 +16215,7 @@
         <p:spPr>
           <a:xfrm>
             <a:off x="640080" y="292608"/>
-            <a:ext cx="10881360" cy="329184"/>
+            <a:ext cx="9509760" cy="329184"/>
           </a:xfrm>
           <a:prstGeom prst="rect">
             <a:avLst/>
@@ -13255,7 +16254,7 @@
         <p:spPr>
           <a:xfrm>
             <a:off x="640080" y="658368"/>
-            <a:ext cx="10881360" cy="822960"/>
+            <a:ext cx="9509760" cy="822960"/>
           </a:xfrm>
           <a:prstGeom prst="rect">
             <a:avLst/>
@@ -13330,7 +16329,46 @@
       </p:sp>
       <p:sp>
         <p:nvSpPr>
-          <p:cNvPr id="6" name="ACT0"/>
+          <p:cNvPr id="6" name="!!GHOST"/>
+          <p:cNvSpPr txBox="1"/>
+          <p:nvPr/>
+        </p:nvSpPr>
+        <p:spPr>
+          <a:xfrm>
+            <a:off x="10287000" y="256032"/>
+            <a:ext cx="1325880" cy="1188720"/>
+          </a:xfrm>
+          <a:prstGeom prst="rect">
+            <a:avLst/>
+          </a:prstGeom>
+          <a:noFill/>
+        </p:spPr>
+        <p:txBody>
+          <a:bodyPr wrap="square" anchor="t">
+            <a:spAutoFit/>
+          </a:bodyPr>
+          <a:lstStyle/>
+          <a:p>
+            <a:pPr algn="r">
+              <a:spcAft>
+                <a:spcPts val="0"/>
+              </a:spcAft>
+            </a:pPr>
+            <a:r>
+              <a:rPr sz="5200" b="1" i="0">
+                <a:solidFill>
+                  <a:srgbClr val="5A4C24"/>
+                </a:solidFill>
+                <a:latin typeface="Georgia"/>
+              </a:rPr>
+              <a:t>02</a:t>
+            </a:r>
+          </a:p>
+        </p:txBody>
+      </p:sp>
+      <p:sp>
+        <p:nvSpPr>
+          <p:cNvPr id="7" name="ACT0"/>
           <p:cNvSpPr/>
           <p:nvPr/>
         </p:nvSpPr>
@@ -13377,7 +16415,7 @@
       </p:sp>
       <p:sp>
         <p:nvSpPr>
-          <p:cNvPr id="7" name="TextBox 6"/>
+          <p:cNvPr id="8" name="TextBox 7"/>
           <p:cNvSpPr txBox="1"/>
           <p:nvPr/>
         </p:nvSpPr>
@@ -13416,7 +16454,7 @@
       </p:sp>
       <p:sp>
         <p:nvSpPr>
-          <p:cNvPr id="8" name="ACT1"/>
+          <p:cNvPr id="9" name="ACT1"/>
           <p:cNvSpPr/>
           <p:nvPr/>
         </p:nvSpPr>
@@ -13463,7 +16501,7 @@
       </p:sp>
       <p:sp>
         <p:nvSpPr>
-          <p:cNvPr id="9" name="TextBox 8"/>
+          <p:cNvPr id="10" name="TextBox 9"/>
           <p:cNvSpPr txBox="1"/>
           <p:nvPr/>
         </p:nvSpPr>
@@ -13502,7 +16540,7 @@
       </p:sp>
       <p:sp>
         <p:nvSpPr>
-          <p:cNvPr id="10" name="ACT2"/>
+          <p:cNvPr id="11" name="ACT2"/>
           <p:cNvSpPr/>
           <p:nvPr/>
         </p:nvSpPr>
@@ -13549,7 +16587,7 @@
       </p:sp>
       <p:sp>
         <p:nvSpPr>
-          <p:cNvPr id="11" name="TextBox 10"/>
+          <p:cNvPr id="12" name="TextBox 11"/>
           <p:cNvSpPr txBox="1"/>
           <p:nvPr/>
         </p:nvSpPr>
@@ -13588,7 +16626,7 @@
       </p:sp>
       <p:sp>
         <p:nvSpPr>
-          <p:cNvPr id="12" name="ACT3"/>
+          <p:cNvPr id="13" name="ACT3"/>
           <p:cNvSpPr/>
           <p:nvPr/>
         </p:nvSpPr>
@@ -13635,7 +16673,7 @@
       </p:sp>
       <p:sp>
         <p:nvSpPr>
-          <p:cNvPr id="13" name="TextBox 12"/>
+          <p:cNvPr id="14" name="TextBox 13"/>
           <p:cNvSpPr txBox="1"/>
           <p:nvPr/>
         </p:nvSpPr>
@@ -13674,7 +16712,7 @@
       </p:sp>
       <p:sp>
         <p:nvSpPr>
-          <p:cNvPr id="14" name="ACT4"/>
+          <p:cNvPr id="15" name="ACT4"/>
           <p:cNvSpPr/>
           <p:nvPr/>
         </p:nvSpPr>
@@ -13721,7 +16759,7 @@
       </p:sp>
       <p:sp>
         <p:nvSpPr>
-          <p:cNvPr id="15" name="TextBox 14"/>
+          <p:cNvPr id="16" name="TextBox 15"/>
           <p:cNvSpPr txBox="1"/>
           <p:nvPr/>
         </p:nvSpPr>
@@ -13760,7 +16798,7 @@
       </p:sp>
       <p:sp>
         <p:nvSpPr>
-          <p:cNvPr id="16" name="TextBox 15"/>
+          <p:cNvPr id="17" name="TextBox 16"/>
           <p:cNvSpPr txBox="1"/>
           <p:nvPr/>
         </p:nvSpPr>
@@ -13819,7 +16857,7 @@
       </p:sp>
       <p:sp>
         <p:nvSpPr>
-          <p:cNvPr id="17" name="!!FOOT"/>
+          <p:cNvPr id="18" name="!!FOOT"/>
           <p:cNvSpPr txBox="1"/>
           <p:nvPr/>
         </p:nvSpPr>
@@ -13858,7 +16896,7 @@
       </p:sp>
       <p:sp>
         <p:nvSpPr>
-          <p:cNvPr id="18" name="!!NUM"/>
+          <p:cNvPr id="19" name="!!NUM"/>
           <p:cNvSpPr txBox="1"/>
           <p:nvPr/>
         </p:nvSpPr>
@@ -13977,7 +17015,7 @@
         <p:spPr>
           <a:xfrm>
             <a:off x="640080" y="292608"/>
-            <a:ext cx="10881360" cy="329184"/>
+            <a:ext cx="9509760" cy="329184"/>
           </a:xfrm>
           <a:prstGeom prst="rect">
             <a:avLst/>
@@ -14016,7 +17054,7 @@
         <p:spPr>
           <a:xfrm>
             <a:off x="640080" y="658368"/>
-            <a:ext cx="10881360" cy="822960"/>
+            <a:ext cx="9509760" cy="822960"/>
           </a:xfrm>
           <a:prstGeom prst="rect">
             <a:avLst/>
@@ -14091,7 +17129,46 @@
       </p:sp>
       <p:sp>
         <p:nvSpPr>
-          <p:cNvPr id="6" name="TEC0"/>
+          <p:cNvPr id="6" name="!!GHOST"/>
+          <p:cNvSpPr txBox="1"/>
+          <p:nvPr/>
+        </p:nvSpPr>
+        <p:spPr>
+          <a:xfrm>
+            <a:off x="10287000" y="256032"/>
+            <a:ext cx="1325880" cy="1188720"/>
+          </a:xfrm>
+          <a:prstGeom prst="rect">
+            <a:avLst/>
+          </a:prstGeom>
+          <a:noFill/>
+        </p:spPr>
+        <p:txBody>
+          <a:bodyPr wrap="square" anchor="t">
+            <a:spAutoFit/>
+          </a:bodyPr>
+          <a:lstStyle/>
+          <a:p>
+            <a:pPr algn="r">
+              <a:spcAft>
+                <a:spcPts val="0"/>
+              </a:spcAft>
+            </a:pPr>
+            <a:r>
+              <a:rPr sz="5200" b="1" i="0">
+                <a:solidFill>
+                  <a:srgbClr val="5A4C24"/>
+                </a:solidFill>
+                <a:latin typeface="Georgia"/>
+              </a:rPr>
+              <a:t>02</a:t>
+            </a:r>
+          </a:p>
+        </p:txBody>
+      </p:sp>
+      <p:sp>
+        <p:nvSpPr>
+          <p:cNvPr id="7" name="TEC0"/>
           <p:cNvSpPr/>
           <p:nvPr/>
         </p:nvSpPr>
@@ -14138,7 +17215,7 @@
       </p:sp>
       <p:sp>
         <p:nvSpPr>
-          <p:cNvPr id="7" name="TextBox 6"/>
+          <p:cNvPr id="8" name="TextBox 7"/>
           <p:cNvSpPr txBox="1"/>
           <p:nvPr/>
         </p:nvSpPr>
@@ -14203,7 +17280,7 @@
       </p:sp>
       <p:sp>
         <p:nvSpPr>
-          <p:cNvPr id="8" name="TEC1"/>
+          <p:cNvPr id="9" name="TEC1"/>
           <p:cNvSpPr/>
           <p:nvPr/>
         </p:nvSpPr>
@@ -14250,7 +17327,7 @@
       </p:sp>
       <p:sp>
         <p:nvSpPr>
-          <p:cNvPr id="9" name="TextBox 8"/>
+          <p:cNvPr id="10" name="TextBox 9"/>
           <p:cNvSpPr txBox="1"/>
           <p:nvPr/>
         </p:nvSpPr>
@@ -14315,7 +17392,7 @@
       </p:sp>
       <p:sp>
         <p:nvSpPr>
-          <p:cNvPr id="10" name="TEC2"/>
+          <p:cNvPr id="11" name="TEC2"/>
           <p:cNvSpPr/>
           <p:nvPr/>
         </p:nvSpPr>
@@ -14362,7 +17439,7 @@
       </p:sp>
       <p:sp>
         <p:nvSpPr>
-          <p:cNvPr id="11" name="TextBox 10"/>
+          <p:cNvPr id="12" name="TextBox 11"/>
           <p:cNvSpPr txBox="1"/>
           <p:nvPr/>
         </p:nvSpPr>
@@ -14427,7 +17504,7 @@
       </p:sp>
       <p:sp>
         <p:nvSpPr>
-          <p:cNvPr id="12" name="TEC3"/>
+          <p:cNvPr id="13" name="TEC3"/>
           <p:cNvSpPr/>
           <p:nvPr/>
         </p:nvSpPr>
@@ -14474,7 +17551,7 @@
       </p:sp>
       <p:sp>
         <p:nvSpPr>
-          <p:cNvPr id="13" name="TextBox 12"/>
+          <p:cNvPr id="14" name="TextBox 13"/>
           <p:cNvSpPr txBox="1"/>
           <p:nvPr/>
         </p:nvSpPr>
@@ -14539,7 +17616,7 @@
       </p:sp>
       <p:sp>
         <p:nvSpPr>
-          <p:cNvPr id="14" name="TEC4"/>
+          <p:cNvPr id="15" name="TEC4"/>
           <p:cNvSpPr/>
           <p:nvPr/>
         </p:nvSpPr>
@@ -14586,7 +17663,7 @@
       </p:sp>
       <p:sp>
         <p:nvSpPr>
-          <p:cNvPr id="15" name="TextBox 14"/>
+          <p:cNvPr id="16" name="TextBox 15"/>
           <p:cNvSpPr txBox="1"/>
           <p:nvPr/>
         </p:nvSpPr>
@@ -14651,7 +17728,7 @@
       </p:sp>
       <p:sp>
         <p:nvSpPr>
-          <p:cNvPr id="16" name="TEC5"/>
+          <p:cNvPr id="17" name="TEC5"/>
           <p:cNvSpPr/>
           <p:nvPr/>
         </p:nvSpPr>
@@ -14698,7 +17775,7 @@
       </p:sp>
       <p:sp>
         <p:nvSpPr>
-          <p:cNvPr id="17" name="TextBox 16"/>
+          <p:cNvPr id="18" name="TextBox 17"/>
           <p:cNvSpPr txBox="1"/>
           <p:nvPr/>
         </p:nvSpPr>
@@ -14763,7 +17840,7 @@
       </p:sp>
       <p:sp>
         <p:nvSpPr>
-          <p:cNvPr id="18" name="TEC6"/>
+          <p:cNvPr id="19" name="TEC6"/>
           <p:cNvSpPr/>
           <p:nvPr/>
         </p:nvSpPr>
@@ -14810,7 +17887,7 @@
       </p:sp>
       <p:sp>
         <p:nvSpPr>
-          <p:cNvPr id="19" name="TextBox 18"/>
+          <p:cNvPr id="20" name="TextBox 19"/>
           <p:cNvSpPr txBox="1"/>
           <p:nvPr/>
         </p:nvSpPr>
@@ -14875,7 +17952,7 @@
       </p:sp>
       <p:sp>
         <p:nvSpPr>
-          <p:cNvPr id="20" name="TEC7"/>
+          <p:cNvPr id="21" name="TEC7"/>
           <p:cNvSpPr/>
           <p:nvPr/>
         </p:nvSpPr>
@@ -14922,7 +17999,7 @@
       </p:sp>
       <p:sp>
         <p:nvSpPr>
-          <p:cNvPr id="21" name="TextBox 20"/>
+          <p:cNvPr id="22" name="TextBox 21"/>
           <p:cNvSpPr txBox="1"/>
           <p:nvPr/>
         </p:nvSpPr>
@@ -14987,7 +18064,7 @@
       </p:sp>
       <p:sp>
         <p:nvSpPr>
-          <p:cNvPr id="22" name="!!FOOT"/>
+          <p:cNvPr id="23" name="!!FOOT"/>
           <p:cNvSpPr txBox="1"/>
           <p:nvPr/>
         </p:nvSpPr>
@@ -15026,7 +18103,7 @@
       </p:sp>
       <p:sp>
         <p:nvSpPr>
-          <p:cNvPr id="23" name="!!NUM"/>
+          <p:cNvPr id="24" name="!!NUM"/>
           <p:cNvSpPr txBox="1"/>
           <p:nvPr/>
         </p:nvSpPr>
@@ -15145,7 +18222,7 @@
         <p:spPr>
           <a:xfrm>
             <a:off x="640080" y="292608"/>
-            <a:ext cx="10881360" cy="329184"/>
+            <a:ext cx="9509760" cy="329184"/>
           </a:xfrm>
           <a:prstGeom prst="rect">
             <a:avLst/>
@@ -15184,7 +18261,7 @@
         <p:spPr>
           <a:xfrm>
             <a:off x="640080" y="658368"/>
-            <a:ext cx="10881360" cy="822960"/>
+            <a:ext cx="9509760" cy="822960"/>
           </a:xfrm>
           <a:prstGeom prst="rect">
             <a:avLst/>
@@ -15257,9 +18334,48 @@
           </a:p>
         </p:txBody>
       </p:sp>
+      <p:sp>
+        <p:nvSpPr>
+          <p:cNvPr id="6" name="!!GHOST"/>
+          <p:cNvSpPr txBox="1"/>
+          <p:nvPr/>
+        </p:nvSpPr>
+        <p:spPr>
+          <a:xfrm>
+            <a:off x="10287000" y="256032"/>
+            <a:ext cx="1325880" cy="1188720"/>
+          </a:xfrm>
+          <a:prstGeom prst="rect">
+            <a:avLst/>
+          </a:prstGeom>
+          <a:noFill/>
+        </p:spPr>
+        <p:txBody>
+          <a:bodyPr wrap="square" anchor="t">
+            <a:spAutoFit/>
+          </a:bodyPr>
+          <a:lstStyle/>
+          <a:p>
+            <a:pPr algn="r">
+              <a:spcAft>
+                <a:spcPts val="0"/>
+              </a:spcAft>
+            </a:pPr>
+            <a:r>
+              <a:rPr sz="5200" b="1" i="0">
+                <a:solidFill>
+                  <a:srgbClr val="5A4C24"/>
+                </a:solidFill>
+                <a:latin typeface="Georgia"/>
+              </a:rPr>
+              <a:t>02</a:t>
+            </a:r>
+          </a:p>
+        </p:txBody>
+      </p:sp>
       <p:pic>
         <p:nvPicPr>
-          <p:cNvPr id="6" name="ARCHI" descr="fig20_archilogicielle.png"/>
+          <p:cNvPr id="7" name="ARCHI" descr="fig20_archilogicielle.png"/>
           <p:cNvPicPr>
             <a:picLocks noChangeAspect="1"/>
           </p:cNvPicPr>
@@ -15276,19 +18392,21 @@
             <a:off x="2768346" y="1737360"/>
             <a:ext cx="6652259" cy="4434840"/>
           </a:xfrm>
-          <a:prstGeom prst="rect">
-            <a:avLst/>
-          </a:prstGeom>
           <a:ln w="15875">
             <a:solidFill>
               <a:srgbClr val="9A7B3F"/>
             </a:solidFill>
           </a:ln>
+          <a:prstGeom prst="roundRect">
+            <a:avLst>
+              <a:gd name="adj" fmla="val 9000"/>
+            </a:avLst>
+          </a:prstGeom>
         </p:spPr>
       </p:pic>
       <p:sp>
         <p:nvSpPr>
-          <p:cNvPr id="7" name="!!FOOT"/>
+          <p:cNvPr id="8" name="!!FOOT"/>
           <p:cNvSpPr txBox="1"/>
           <p:nvPr/>
         </p:nvSpPr>
@@ -15327,7 +18445,7 @@
       </p:sp>
       <p:sp>
         <p:nvSpPr>
-          <p:cNvPr id="8" name="!!NUM"/>
+          <p:cNvPr id="9" name="!!NUM"/>
           <p:cNvSpPr txBox="1"/>
           <p:nvPr/>
         </p:nvSpPr>
